--- a/assets/test-evaluation-a.pptx
+++ b/assets/test-evaluation-a.pptx
@@ -514,423 +514,609 @@
           <a:p>
             <a:r>
               <a:rPr lang="en-US"/>
-              <a:t>SELECTED VARIANT A — COUNTS STRICTLY BY TEST TYPE</a:t>
+              <a:t>SELECTED VARIANT A — CI CHECKS AND EXTERNAL SYSTEM TESTS</a:t>
             </a:r>
           </a:p>
           <a:p/>
           <a:p>
             <a:r>
               <a:rPr lang="en-US"/>
-              <a:t>731 unit/component + 77 local integration = 808 unique implemented definitions. This is a static inventory, not an execution result, pass count or coverage percentage. The assignment is based on the asserted boundary, not suite names. Component combines isolated function/module/contract tests; integration crosses a real interface.</a:t>
+              <a:t>PURPOSE</a:t>
+            </a:r>
+          </a:p>
+          <a:p>
+            <a:r>
+              <a:rPr lang="en-US"/>
+              <a:t>Approved replacement for Page 26. The left catalog combines unit/component and</a:t>
+            </a:r>
+          </a:p>
+          <a:p>
+            <a:r>
+              <a:rPr lang="en-US"/>
+              <a:t>local integration tests under CI, grouped by the subject under test. The right</a:t>
+            </a:r>
+          </a:p>
+          <a:p>
+            <a:r>
+              <a:rPr lang="en-US"/>
+              <a:t>catalog explains external scenario types and their expected responses. Counts</a:t>
+            </a:r>
+          </a:p>
+          <a:p>
+            <a:r>
+              <a:rPr lang="en-US"/>
+              <a:t>refer to implementations, not passed executions or independent samples.</a:t>
+            </a:r>
+          </a:p>
+          <a:p>
+            <a:r>
+              <a:rPr lang="en-US"/>
+              <a:t>The source/configuration snapshot is dated 27 September 2026. No test or cloud</a:t>
+            </a:r>
+          </a:p>
+          <a:p>
+            <a:r>
+              <a:rPr lang="en-US"/>
+              <a:t>campaign was executed to build this slide. The adjacent historical 24-round</a:t>
+            </a:r>
+          </a:p>
+          <a:p>
+            <a:r>
+              <a:rPr lang="en-US"/>
+              <a:t>Phala experiment remains separate evidence; it is not attributed to the current</a:t>
+            </a:r>
+          </a:p>
+          <a:p>
+            <a:r>
+              <a:rPr lang="en-US"/>
+              <a:t>SMEW/SMA/test-driver profile.</a:t>
             </a:r>
           </a:p>
           <a:p/>
           <a:p>
             <a:r>
               <a:rPr lang="en-US"/>
-              <a:t>CURRENT CODE VERSUS HISTORICAL EVIDENCE</a:t>
-            </a:r>
-          </a:p>
-          <a:p>
-            <a:r>
-              <a:rPr lang="en-US"/>
-              <a:t>Includes the current RA-TLS, legacy mTLS, ZK, infrastructure and deployment-helper suites. These counts do not describe the exact code version of the September 1, 2026 Phala run. That separate run used six worker CVMs, 24 successful federated rounds and final inference with the round-25 model. It did not exercise aggregator failover. Its exported evidence does not preserve original evidence.cbor/transparent-statement byte files.</a:t>
+              <a:t>CI BOUNDARY AND COUNTING</a:t>
+            </a:r>
+          </a:p>
+          <a:p>
+            <a:r>
+              <a:rPr lang="en-US"/>
+              <a:t>878 unique CI-selected declarations: 617 Python, 145 Solidity and 116 Node tests.</a:t>
+            </a:r>
+          </a:p>
+          <a:p>
+            <a:r>
+              <a:rPr lang="en-US"/>
+              <a:t>The seven groups are mutually exclusive assignments of test source areas. Each</a:t>
+            </a:r>
+          </a:p>
+          <a:p>
+            <a:r>
+              <a:rPr lang="en-US"/>
+              <a:t>declaration counts once; parametrization, loops, repeated workflow invocations</a:t>
+            </a:r>
+          </a:p>
+          <a:p>
+            <a:r>
+              <a:rPr lang="en-US"/>
+              <a:t>and subtests are not expanded. Conditional skips remain included. The scope is</a:t>
+            </a:r>
+          </a:p>
+          <a:p>
+            <a:r>
+              <a:rPr lang="en-US"/>
+              <a:t>vita-fl/.github/workflows/ci.yml and the explicit test entrypoints it selects.</a:t>
+            </a:r>
+          </a:p>
+          <a:p>
+            <a:r>
+              <a:rPr lang="en-US"/>
+              <a:t>The node job installs Foundry and requires the Anvil transaction tests. The CI</a:t>
+            </a:r>
+          </a:p>
+          <a:p>
+            <a:r>
+              <a:rPr lang="en-US"/>
+              <a:t>runs on GitHub-hosted Ubuntu for push/PR on main and phala_app_key or manual</a:t>
+            </a:r>
+          </a:p>
+          <a:p>
+            <a:r>
+              <a:rPr lang="en-US"/>
+              <a:t>workflow dispatch. Lint, formatting, build steps and the two runtime readiness</a:t>
+            </a:r>
+          </a:p>
+          <a:p>
+            <a:r>
+              <a:rPr lang="en-US"/>
+              <a:t>checks for Anvil/IPFS are additional pipeline checks, excluded from the 878.</a:t>
+            </a:r>
+          </a:p>
+          <a:p>
+            <a:r>
+              <a:rPr lang="en-US"/>
+              <a:t>The previous 808 inventory is historical. No new unit/integration split is</a:t>
+            </a:r>
+          </a:p>
+          <a:p>
+            <a:r>
+              <a:rPr lang="en-US"/>
+              <a:t>asserted: new tests require fresh assertion-level classification if that split</a:t>
+            </a:r>
+          </a:p>
+          <a:p>
+            <a:r>
+              <a:rPr lang="en-US"/>
+              <a:t>is ever needed again. Unit/component/integration are merged by explicit request.</a:t>
+            </a:r>
+          </a:p>
+          <a:p>
+            <a:r>
+              <a:rPr lang="en-US"/>
+              <a:t>Tests of the TD, SMEW and SMA tools are not silently added to the vita-fl CI count.</a:t>
             </a:r>
           </a:p>
           <a:p/>
           <a:p>
             <a:r>
               <a:rPr lang="en-US"/>
-              <a:t>SYSTEM AND PRODUCTION</a:t>
-            </a:r>
-          </a:p>
-          <a:p>
-            <a:r>
-              <a:rPr lang="en-US"/>
-              <a:t>Zero system tests means no implemented automated full training-to-inference test suite in the audited CI scope. The manual Phala run is system-level evidence. Two shell-based service smoke checks query Anvil eth_chainId and IPFS version; counted separately from the 808 framework definitions and not considered complete system tests. Production is an environment, not a fourth formal test level. No dedicated production-test suite was identified; deployment readiness and existing operational metrics are not counted as one.</a:t>
+              <a:t>EXTERNAL SCOPE AND CONFIGURATION</a:t>
+            </a:r>
+          </a:p>
+          <a:p>
+            <a:r>
+              <a:rPr lang="en-US"/>
+              <a:t>The TD has nine CLI modes. Eight are considered here: configuration, normal,</a:t>
+            </a:r>
+          </a:p>
+          <a:p>
+            <a:r>
+              <a:rPr lang="en-US"/>
+              <a:t>early, partial, zero, recovery, inference and security. The optional manipulation</a:t>
+            </a:r>
+          </a:p>
+          <a:p>
+            <a:r>
+              <a:rPr lang="en-US"/>
+              <a:t>mode is excluded according to the user's requested scope. Tool-order attacks are</a:t>
+            </a:r>
+          </a:p>
+          <a:p>
+            <a:r>
+              <a:rPr lang="en-US"/>
+              <a:t>also excluded. Eight implemented modes do not mean eight passed live scenarios.</a:t>
+            </a:r>
+          </a:p>
+          <a:p>
+            <a:r>
+              <a:rPr lang="en-US"/>
+              <a:t>The selected local Phala profile has six workers, five successful training rounds,</a:t>
+            </a:r>
+          </a:p>
+          <a:p>
+            <a:r>
+              <a:rPr lang="en-US"/>
+              <a:t>client limit five, epoch one, a 45-second collection deadline, a 3600-second</a:t>
+            </a:r>
+          </a:p>
+          <a:p>
+            <a:r>
+              <a:rPr lang="en-US"/>
+              <a:t>scenario deadline, one-second polling, deployed-agent inference, participant</a:t>
+            </a:r>
+          </a:p>
+          <a:p>
+            <a:r>
+              <a:rPr lang="en-US"/>
+              <a:t>coverage and required transparency audit. Configuration is a setup-only check;</a:t>
+            </a:r>
+          </a:p>
+          <a:p>
+            <a:r>
+              <a:rPr lang="en-US"/>
+              <a:t>the five-round setting applies to training scenarios. train_before_inference is</a:t>
+            </a:r>
+          </a:p>
+          <a:p>
+            <a:r>
+              <a:rPr lang="en-US"/>
+              <a:t>enabled for the inference-only mode in this profile. Bootstrap and aborted</a:t>
+            </a:r>
+          </a:p>
+          <a:p>
+            <a:r>
+              <a:rPr lang="en-US"/>
+              <a:t>attempts are excluded from the five successful rounds. Other runs can vary the</a:t>
+            </a:r>
+          </a:p>
+          <a:p>
+            <a:r>
+              <a:rPr lang="en-US"/>
+              <a:t>parameters, so the profile is not attributed to every historical result.</a:t>
+            </a:r>
+          </a:p>
+          <a:p>
+            <a:r>
+              <a:rPr lang="en-US"/>
+              <a:t>SMEW schedules campaigns/repetitions and validates reports; SMA supervises the</a:t>
+            </a:r>
+          </a:p>
+          <a:p>
+            <a:r>
+              <a:rPr lang="en-US"/>
+              <a:t>local TD subprocess and retrieves Prometheus data for the run window. The TD</a:t>
+            </a:r>
+          </a:p>
+          <a:p>
+            <a:r>
+              <a:rPr lang="en-US"/>
+              <a:t>drives the remote VITA-FL deployment, checks assertions and produces the verdict.</a:t>
+            </a:r>
+          </a:p>
+          <a:p>
+            <a:r>
+              <a:rPr lang="en-US"/>
+              <a:t>No general energy measurement is claimed. Measurements currently include round</a:t>
+            </a:r>
+          </a:p>
+          <a:p>
+            <a:r>
+              <a:rPr lang="en-US"/>
+              <a:t>progress, aborted attempts and transaction gas.</a:t>
             </a:r>
           </a:p>
           <a:p/>
           <a:p>
             <a:r>
               <a:rPr lang="en-US"/>
-              <a:t>CI/CD</a:t>
-            </a:r>
-          </a:p>
-          <a:p>
-            <a:r>
-              <a:rPr lang="en-US"/>
-              <a:t>The configured test suites run on GitHub-hosted Ubuntu runners for pushes/PRs on main and phala_app_key, or manual dispatch. Python uses pytest/unittest, Node uses node --test, contracts use Foundry's local EVM; integration dependencies run locally on the runner. Tool/environment-dependent cases can skip. The general docker-builds job has no dependency on all test jobs; do not infer a global test gate before publication. Dedicated component publish workflows run selected checks before pushing, and optional Phala deployment depends on publication. No complete deployed lifecycle is automatically tested by these workflows.</a:t>
+              <a:t>EXTERNAL ORACLES</a:t>
+            </a:r>
+          </a:p>
+          <a:p>
+            <a:r>
+              <a:rPr lang="en-US"/>
+              <a:t>configuration: five training parameters round-trip; invalid timeouts are rejected</a:t>
+            </a:r>
+          </a:p>
+          <a:p>
+            <a:r>
+              <a:rPr lang="en-US"/>
+              <a:t>with HTTP 400 and the saved configuration remains unchanged.</a:t>
+            </a:r>
+          </a:p>
+          <a:p>
+            <a:r>
+              <a:rPr lang="en-US"/>
+              <a:t>normal: completed nonempty rounds, count/root/policy consistency, unchanged frozen</a:t>
+            </a:r>
+          </a:p>
+          <a:p>
+            <a:r>
+              <a:rPr lang="en-US"/>
+              <a:t>roster and all-six-worker participation; finalized-model inference is verified.</a:t>
+            </a:r>
+          </a:p>
+          <a:p>
+            <a:r>
+              <a:rPr lang="en-US"/>
+              <a:t>early/partial/zero: a cooperative admin-controlled upload gate at the deployed</a:t>
+            </a:r>
+          </a:p>
+          <a:p>
+            <a:r>
+              <a:rPr lang="en-US"/>
+              <a:t>receiver limits accepted clients in the first training round. Respectively 5,</a:t>
+            </a:r>
+          </a:p>
+          <a:p>
+            <a:r>
+              <a:rPr lang="en-US"/>
+              <a:t>2 or 0 accepted inputs establish early closure, exact partial publication after</a:t>
+            </a:r>
+          </a:p>
+          <a:p>
+            <a:r>
+              <a:rPr lang="en-US"/>
+              <a:t>the deadline, or no publication followed by quorum recovery. This is explicit</a:t>
+            </a:r>
+          </a:p>
+          <a:p>
+            <a:r>
+              <a:rPr lang="en-US"/>
+              <a:t>test instrumentation; the gate is not described as a network outage. The receipt</a:t>
+            </a:r>
+          </a:p>
+          <a:p>
+            <a:r>
+              <a:rPr lang="en-US"/>
+              <a:t>of a gate command alone does not establish the expected contribution set.</a:t>
+            </a:r>
+          </a:p>
+          <a:p>
+            <a:r>
+              <a:rPr lang="en-US"/>
+              <a:t>recovery: stop and confirm the selected aggregator CVM, observe three distinct</a:t>
+            </a:r>
+          </a:p>
+          <a:p>
+            <a:r>
+              <a:rPr lang="en-US"/>
+              <a:t>eligible reports out of five voters, keep the old state below quorum, then prove</a:t>
+            </a:r>
+          </a:p>
+          <a:p>
+            <a:r>
+              <a:rPr lang="en-US"/>
+              <a:t>abort/reselection on the third vote and successful resumed publication. Restore</a:t>
+            </a:r>
+          </a:p>
+          <a:p>
+            <a:r>
+              <a:rPr lang="en-US"/>
+              <a:t>the CVM; cleanup failure invalidates the run. The local aggregator timer is not</a:t>
+            </a:r>
+          </a:p>
+          <a:p>
+            <a:r>
+              <a:rPr lang="en-US"/>
+              <a:t>replaced or advanced by the driver. Contract vote conditions remain separate.</a:t>
+            </a:r>
+          </a:p>
+          <a:p>
+            <a:r>
+              <a:rPr lang="en-US"/>
+              <a:t>security: 16 required checks comprise five UI/control checks, four read-only EVM</a:t>
+            </a:r>
+          </a:p>
+          <a:p>
+            <a:r>
+              <a:rPr lang="en-US"/>
+              <a:t>guards, one positive inference control and six inference authorization negatives.</a:t>
+            </a:r>
+          </a:p>
+          <a:p>
+            <a:r>
+              <a:rPr lang="en-US"/>
+              <a:t>EVM guards use eth_call; they do not submit an attack transaction. Wrong reasons,</a:t>
+            </a:r>
+          </a:p>
+          <a:p>
+            <a:r>
+              <a:rPr lang="en-US"/>
+              <a:t>TLS/network errors and unavailable positive controls do not count as rejection.</a:t>
+            </a:r>
+          </a:p>
+          <a:p>
+            <a:r>
+              <a:rPr lang="en-US"/>
+              <a:t>Audit: 17 additional checks are 10 SCITT publisher/inclusion checks, one AIR/TDX,</a:t>
+            </a:r>
+          </a:p>
+          <a:p>
+            <a:r>
+              <a:rPr lang="en-US"/>
+              <a:t>three attestation sessions and three Sello receipts. Re-fetch published bytes,</a:t>
+            </a:r>
+          </a:p>
+          <a:p>
+            <a:r>
+              <a:rPr lang="en-US"/>
+              <a:t>verify bindings to this run and local trust policy, decrypt owner-authorized</a:t>
+            </a:r>
+          </a:p>
+          <a:p>
+            <a:r>
+              <a:rPr lang="en-US"/>
+              <a:t>Sello context and request fresh Phala quote appraisal. This is independent</a:t>
+            </a:r>
+          </a:p>
+          <a:p>
+            <a:r>
+              <a:rPr lang="en-US"/>
+              <a:t>execution using production verifier primitives, not an independent Intel DCAP</a:t>
+            </a:r>
+          </a:p>
+          <a:p>
+            <a:r>
+              <a:rPr lang="en-US"/>
+              <a:t>implementation or a reconstruction of the original TLS/PoP handshake.</a:t>
+            </a:r>
+          </a:p>
+          <a:p>
+            <a:r>
+              <a:rPr lang="en-US"/>
+              <a:t>The audit spans inference-enabled scenarios; it is not a ninth scenario mode.</a:t>
+            </a:r>
+          </a:p>
+          <a:p>
+            <a:r>
+              <a:rPr lang="en-US"/>
+              <a:t>16 security checks and 17 audit checks are not added to the scenario count.</a:t>
             </a:r>
           </a:p>
           <a:p/>
           <a:p>
             <a:r>
               <a:rPr lang="en-US"/>
-              <a:t>AUDIT AND IMPLEMENTATION MAP</a:t>
-            </a:r>
-          </a:p>
-          <a:p>
-            <a:r>
-              <a:rPr lang="en-US"/>
-              <a:t># Static test inventory</a:t>
+              <a:t>INTERPRETATION</a:t>
+            </a:r>
+          </a:p>
+          <a:p>
+            <a:r>
+              <a:rPr lang="en-US"/>
+              <a:t>This slide inventories configured tests, not clinical quality, LLM reasoning,</a:t>
+            </a:r>
+          </a:p>
+          <a:p>
+            <a:r>
+              <a:rPr lang="en-US"/>
+              <a:t>load capacity or complete coverage of Chapter 4 threats. Configuration and code</a:t>
+            </a:r>
+          </a:p>
+          <a:p>
+            <a:r>
+              <a:rPr lang="en-US"/>
+              <a:t>availability are kept separate from observed live outcomes. Existing reports</a:t>
+            </a:r>
+          </a:p>
+          <a:p>
+            <a:r>
+              <a:rPr lang="en-US"/>
+              <a:t>contain a five-round Recovery PASS and a complete 17-check audit; early, partial,</a:t>
+            </a:r>
+          </a:p>
+          <a:p>
+            <a:r>
+              <a:rPr lang="en-US"/>
+              <a:t>zero and security must not be described as demonstrated successes from that run.</a:t>
+            </a:r>
+          </a:p>
+          <a:p>
+            <a:r>
+              <a:rPr lang="en-US"/>
+              <a:t>Some code properties have no live fault probe.</a:t>
             </a:r>
           </a:p>
           <a:p/>
           <a:p>
             <a:r>
               <a:rPr lang="en-US"/>
-              <a:t>**808 implemented test definitions: 731 unit/component, 77 local integration, 0 complete automated system E2E.**</a:t>
+              <a:t>SOURCE MAP</a:t>
+            </a:r>
+          </a:p>
+          <a:p>
+            <a:r>
+              <a:rPr lang="en-US"/>
+              <a:t>Full current CI declaration manifest and source hashes: ci-inventory.json.</a:t>
+            </a:r>
+          </a:p>
+          <a:p>
+            <a:r>
+              <a:rPr lang="en-US"/>
+              <a:t>External scenario groups and public configuration: external-scope.json.</a:t>
+            </a:r>
+          </a:p>
+          <a:p>
+            <a:r>
+              <a:rPr lang="en-US"/>
+              <a:t>Presentation-facing labels/mapping: slide-data.json.</a:t>
+            </a:r>
+          </a:p>
+          <a:p>
+            <a:r>
+              <a:rPr lang="en-US"/>
+              <a:t>vita-fl/.github/workflows/ci.yml</a:t>
+            </a:r>
+          </a:p>
+          <a:p>
+            <a:r>
+              <a:rPr lang="en-US"/>
+              <a:t>vita-fl-td/src/vita_fl_td/config.py</a:t>
+            </a:r>
+          </a:p>
+          <a:p>
+            <a:r>
+              <a:rPr lang="en-US"/>
+              <a:t>vita-fl-td/src/vita_fl_td/runner.py</a:t>
+            </a:r>
+          </a:p>
+          <a:p>
+            <a:r>
+              <a:rPr lang="en-US"/>
+              <a:t>vita-fl-td/src/vita_fl_td/quorum.py</a:t>
+            </a:r>
+          </a:p>
+          <a:p>
+            <a:r>
+              <a:rPr lang="en-US"/>
+              <a:t>vita-fl-td/src/vita_fl_td/security_bridge.py</a:t>
+            </a:r>
+          </a:p>
+          <a:p>
+            <a:r>
+              <a:rPr lang="en-US"/>
+              <a:t>vita-fl-td/src/vita_fl_td/transparency_audit.py</a:t>
+            </a:r>
+          </a:p>
+          <a:p>
+            <a:r>
+              <a:rPr lang="en-US"/>
+              <a:t>vita-fl-td/docs/security-scenarios.md</a:t>
+            </a:r>
+          </a:p>
+          <a:p>
+            <a:r>
+              <a:rPr lang="en-US"/>
+              <a:t>vita-fl-td/docs/transparency-audit.md</a:t>
+            </a:r>
+          </a:p>
+          <a:p>
+            <a:r>
+              <a:rPr lang="en-US"/>
+              <a:t>SMEW/README.md</a:t>
+            </a:r>
+          </a:p>
+          <a:p>
+            <a:r>
+              <a:rPr lang="en-US"/>
+              <a:t>sustainability-measurement-agent/sma/sma.py</a:t>
             </a:r>
           </a:p>
           <a:p/>
-          <a:p>
-            <a:r>
-              <a:rPr lang="en-US"/>
-              <a:t>This is a source inventory, not an execution report. No pass rate, successful CI run or new test result is claimed. Production is an execution context, not a fourth test level.</a:t>
-            </a:r>
-          </a:p>
           <a:p/>
           <a:p>
             <a:r>
               <a:rPr lang="en-US"/>
-              <a:t>| Test type | Definitions | Boundary |</a:t>
-            </a:r>
-          </a:p>
-          <a:p>
-            <a:r>
-              <a:rPr lang="en-US"/>
-              <a:t>|---|---:|---|</a:t>
-            </a:r>
-          </a:p>
-          <a:p>
-            <a:r>
-              <a:rPr lang="en-US"/>
-              <a:t>| Unit/component | 731 | Isolated functions, modules, contracts, crypto, guards, source and configuration checks; dependencies controlled |</a:t>
-            </a:r>
-          </a:p>
-          <a:p>
-            <a:r>
-              <a:rPr lang="en-US"/>
-              <a:t>| Local integration | 77 | Actual API/socket/process boundaries or asserted collaboration of production components; selected dependencies can remain mocked |</a:t>
-            </a:r>
-          </a:p>
-          <a:p>
-            <a:r>
-              <a:rPr lang="en-US"/>
-              <a:t>| Complete system E2E | 0 | No automated full application lifecycle established in the selected CI test definitions |</a:t>
-            </a:r>
-          </a:p>
-          <a:p/>
-          <a:p>
-            <a:r>
-              <a:rPr lang="en-US"/>
-              <a:t>Languages: **569 Python, 138 Solidity, 101 Node**; **96 test files**.</a:t>
-            </a:r>
-          </a:p>
-          <a:p/>
-          <a:p>
-            <a:r>
-              <a:rPr lang="en-US"/>
-              <a:t>## Counting and classification rules</a:t>
-            </a:r>
-          </a:p>
-          <a:p/>
-          <a:p>
-            <a:r>
-              <a:rPr lang="en-US"/>
-              <a:t>- U: isolated production function/module/contract/library, fixtures/mocks, pure/source/configuration checks.</a:t>
-            </a:r>
-          </a:p>
-          <a:p>
-            <a:r>
-              <a:rPr lang="en-US"/>
-              <a:t>- I: asserted behavior crosses a real production API/service/process boundary or actively composes production components; external dependencies may remain mocked.</a:t>
-            </a:r>
-          </a:p>
-          <a:p>
-            <a:r>
-              <a:rPr lang="en-US"/>
-              <a:t>- Classification is assertion-specific: fixture construction, filenames and end_to_end in a name do not determine the category.</a:t>
-            </a:r>
-          </a:p>
-          <a:p>
-            <a:r>
-              <a:rPr lang="en-US"/>
-              <a:t>- The exact reviewed integration whitelist is encoded in inventory_tests.py; all other inventoried definitions are U.</a:t>
-            </a:r>
-          </a:p>
-          <a:p>
-            <a:r>
-              <a:rPr lang="en-US"/>
-              <a:t>- System E2E means an automated complete application lifecycle; none is defined in this inventory.</a:t>
-            </a:r>
-          </a:p>
-          <a:p>
-            <a:r>
-              <a:rPr lang="en-US"/>
-              <a:t>- Production is an execution context, not an additional test level; no automated production execution is established by this static inventory.</a:t>
-            </a:r>
-          </a:p>
-          <a:p>
-            <a:r>
-              <a:rPr lang="en-US"/>
-              <a:t>- Count declarations, not executions. Parametrization, subtests, loops and duplicate runs in publisher workflows are not expanded.</a:t>
-            </a:r>
-          </a:p>
-          <a:p>
-            <a:r>
-              <a:rPr lang="en-US"/>
-              <a:t>- Conditional skips remain included: local model fixtures, Terraform, nginx, Smallstep binaries and Docker availability can affect executed counts.</a:t>
-            </a:r>
-          </a:p>
-          <a:p>
-            <a:r>
-              <a:rPr lang="en-US"/>
-              <a:t>- Python uses static AST traversal; Solidity and Node use static declaration matching for this checkout's source style. Tests are never imported or collected.</a:t>
-            </a:r>
-          </a:p>
-          <a:p>
-            <a:r>
-              <a:rPr lang="en-US"/>
-              <a:t>- A model-inference function or Hybrid-R test named end_to_end remains a component test. Direct control-API calls with mocked dependencies remain component tests; ASGI/HTTP requests exercise integration boundaries.</a:t>
-            </a:r>
-          </a:p>
-          <a:p>
-            <a:r>
-              <a:rPr lang="en-US"/>
-              <a:t>- Only the positive AIR-v2 service-emitter/agent-verifier compatibility test is classified as integration in test_ratls.py; isolated rejection guards stay component tests despite a composed fixture.</a:t>
-            </a:r>
-          </a:p>
-          <a:p>
-            <a:r>
-              <a:rPr lang="en-US"/>
-              <a:t>- Solidity integration requires the assertion to traverse actual production contracts. Cross-contract setup alone and a mocked TDX verifier do not establish that scope.</a:t>
-            </a:r>
-          </a:p>
-          <a:p>
-            <a:r>
-              <a:rPr lang="en-US"/>
-              <a:t>- This checkout includes newer RA-TLS definitions. Their inventory must not be attributed to the historical mTLS/AIR-v1 cloud run.</a:t>
-            </a:r>
-          </a:p>
-          <a:p/>
-          <a:p>
-            <a:r>
-              <a:rPr lang="en-US"/>
-              <a:t>## CI execution configuration</a:t>
-            </a:r>
-          </a:p>
-          <a:p/>
-          <a:p>
-            <a:r>
-              <a:rPr lang="en-US"/>
-              <a:t>Primary source: [ci.yml](../../../vita-fl/.github/workflows/ci.yml). CI is configured for push/PR on main and phala_app_key, and manual dispatch. The table describes configured execution, not an observed outcome.</a:t>
-            </a:r>
-          </a:p>
-          <a:p/>
-          <a:p>
-            <a:r>
-              <a:rPr lang="en-US"/>
-              <a:t>| CI job | Unit/component | Local integration | Command scope |</a:t>
-            </a:r>
-          </a:p>
-          <a:p>
-            <a:r>
-              <a:rPr lang="en-US"/>
-              <a:t>|---|---:|---:|---|</a:t>
-            </a:r>
-          </a:p>
-          <a:p>
-            <a:r>
-              <a:rPr lang="en-US"/>
-              <a:t>| python-quality | 461 | 43 | pytest agent/tests and tee_inference/tests; unittest discovery for DFL neural/container, ZK, control API, Phala and transparency-log tests |</a:t>
-            </a:r>
-          </a:p>
-          <a:p>
-            <a:r>
-              <a:rPr lang="en-US"/>
-              <a:t>| transport-pki | 50 | 10 | pytest transport_security/tests pki/tests; CI installs/checks nginx, step and step-ca |</a:t>
-            </a:r>
-          </a:p>
-          <a:p>
-            <a:r>
-              <a:rPr lang="en-US"/>
-              <a:t>| node-server | 89 | 0 | npm test → node --test in dfl/node_server |</a:t>
-            </a:r>
-          </a:p>
-          <a:p>
-            <a:r>
-              <a:rPr lang="en-US"/>
-              <a:t>| smart-contracts | 130 | 20 | forge test -vvv plus node --test test/*.test.mjs |</a:t>
-            </a:r>
-          </a:p>
-          <a:p>
-            <a:r>
-              <a:rPr lang="en-US"/>
-              <a:t>| docker-builds | 1 | 4 | unittest test_docker_build_contexts.py, only matrix.name == tee-inference |</a:t>
-            </a:r>
-          </a:p>
-          <a:p/>
-          <a:p>
-            <a:r>
-              <a:rPr lang="en-US"/>
-              <a:t>Publisher workflows can rerun subsets; those invocations do not create additional definitions.</a:t>
-            </a:r>
-          </a:p>
-          <a:p/>
-          <a:p>
-            <a:r>
-              <a:rPr lang="en-US"/>
-              <a:t>## Separate evidence, excluded from 808</a:t>
-            </a:r>
-          </a:p>
-          <a:p/>
-          <a:p>
-            <a:r>
-              <a:rPr lang="en-US"/>
-              <a:t>- **2 configured service-readiness checks** in runtime-smoke-test: Anvil eth_chainId and IPFS /api/v0/version. They do not execute the full training/inference lifecycle.</a:t>
-            </a:r>
-          </a:p>
-          <a:p>
-            <a:r>
-              <a:rPr lang="en-US"/>
-              <a:t>- **1 existing manual Phala workflow record**: data/evaluation/authoritative-phala-6w-24r-20260901/README.md (six workers, 24 training rounds and final inference). No new cloud run, full recovery experiment or production qualification is claimed.</a:t>
-            </a:r>
-          </a:p>
-          <a:p/>
-          <a:p>
-            <a:r>
-              <a:rPr lang="en-US"/>
-              <a:t>## Representative assertions</a:t>
-            </a:r>
-          </a:p>
-          <a:p/>
-          <a:p>
-            <a:r>
-              <a:rPr lang="en-US"/>
-              <a:t>| Category | Test | Scope |</a:t>
-            </a:r>
-          </a:p>
-          <a:p>
-            <a:r>
-              <a:rPr lang="en-US"/>
-              <a:t>|---|---|---|</a:t>
-            </a:r>
-          </a:p>
-          <a:p>
-            <a:r>
-              <a:rPr lang="en-US"/>
-              <a:t>| unit_component | `dfl/neural_network/tests/test_dicom_provenance.py:49::test_modified_label_is_rejected` | Isolated production component, protocol/crypto/model/configuration assertion or guard; fixtures and mocked dependencies do not change the tested scope. |</a:t>
-            </a:r>
-          </a:p>
-          <a:p>
-            <a:r>
-              <a:rPr lang="en-US"/>
-              <a:t>| unit_component | `agent/tests/test_tee_inference_client.py:430::test_request_substitution_is_rejected` | Client, orchestration, policy or receipt component assertion with controlled dependencies; fixture crypto alone does not establish a live service boundary. |</a:t>
-            </a:r>
-          </a:p>
-          <a:p>
-            <a:r>
-              <a:rPr lang="en-US"/>
-              <a:t>| local_integration | `tee_inference/tests/test_authorization.py:145::test_publication_failure_cannot_return_success_without_receipt` | Real ASGI requests exercise production routing, authorization, job ownership and receipt handling; model and log dependencies are controlled. |</a:t>
-            </a:r>
-          </a:p>
-          <a:p>
-            <a:r>
-              <a:rPr lang="en-US"/>
-              <a:t>| local_integration | `smart_contracts/test/GMStorageAggregatorReward.t.sol:187::testAtomicFinalizationPublishesAdvancesAndRewardsExactlyOnce` | Assertion exercises real GMStorage-policy publication, threshold or ledger-binding transitions; registry/selection dependencies may be stubs. |</a:t>
-            </a:r>
-          </a:p>
-          <a:p>
-            <a:r>
-              <a:rPr lang="en-US"/>
-              <a:t>| local_integration | `pki/tests/test_step_ca_integration.py:22::test_real_ca_one_use_renewal_and_active_revocation` | Disposable real local step-ca/step processes exercise enrollment, renewal and active revocation; requires their binaries. |</a:t>
-            </a:r>
-          </a:p>
-          <a:p/>
-          <a:p>
-            <a:r>
-              <a:rPr lang="en-US"/>
-              <a:t>## Reproduce and audit</a:t>
-            </a:r>
-          </a:p>
-          <a:p/>
-          <a:p>
-            <a:r>
-              <a:rPr lang="en-US"/>
-              <a:t>From the workspace root:</a:t>
-            </a:r>
-          </a:p>
-          <a:p/>
-          <a:p>
-            <a:r>
-              <a:rPr lang="en-US"/>
-              <a:t>```bash</a:t>
-            </a:r>
-          </a:p>
-          <a:p>
-            <a:r>
-              <a:rPr lang="en-US"/>
-              <a:t>presentation/.venv/bin/python presentation/concepts/test-evaluation/inventory_tests.py</a:t>
-            </a:r>
-          </a:p>
-          <a:p>
-            <a:r>
-              <a:rPr lang="en-US"/>
-              <a:t>```</a:t>
-            </a:r>
-          </a:p>
-          <a:p/>
-          <a:p>
-            <a:r>
-              <a:rPr lang="en-US"/>
-              <a:t>The script asserts 808 = 569 + 138 + 101 and the reviewed 731/77 split, rejecting stale whitelist entries or duplicate identifiers. It writes test-inventory.json, test-inventory.csv and this overview. Each test row includes path, line, name, category, rationale, CI job, source SHA-256 and commit.</a:t>
-            </a:r>
-          </a:p>
-          <a:p/>
-          <a:p>
-            <a:r>
-              <a:rPr lang="en-US"/>
-              <a:t>- Commit: `29b78acafcfe1362257e1cebb3f0f91a0026be80`</a:t>
-            </a:r>
-          </a:p>
-          <a:p>
-            <a:r>
-              <a:rPr lang="en-US"/>
-              <a:t>- Tracked working-tree changes present: `False`</a:t>
-            </a:r>
-          </a:p>
-          <a:p>
-            <a:r>
-              <a:rPr lang="en-US"/>
-              <a:t>- Combined source SHA-256: `e66bc970c69daa0148d2317e1b168c8dcfeeb137e17c42c8cd1b89844ea8a28c`</a:t>
-            </a:r>
-          </a:p>
-          <a:p>
-            <a:r>
-              <a:rPr lang="en-US"/>
-              <a:t>- Inventory script SHA-256: `a12579ac9d6a3387c8170a2f8b16f6004b972434e86e837c1067a4d10b18fa87`</a:t>
-            </a:r>
-          </a:p>
-          <a:p>
-            <a:r>
-              <a:rPr lang="en-US"/>
-              <a:t>- Generated UTC: `2026-09-24T14:09:44.920080+00:00`</a:t>
-            </a:r>
-          </a:p>
-          <a:p/>
-          <a:p>
-            <a:r>
-              <a:rPr lang="en-US"/>
-              <a:t>The commit identifies the base revision; per-file content hashes identify the actual inspected working tree. The combined hash covers every inventoried test file, ci.yml and the Node package.json. It does not hash every production implementation dependency.</a:t>
-            </a:r>
-          </a:p>
-          <a:p/>
-          <a:p>
-            <a:r>
-              <a:rPr lang="en-US"/>
-              <a:t>Machine-readable outputs contain the complete per-definition classification and source-hash manifest. Static classification is a documented operational convention for this evaluation, not a universal taxonomy.</a:t>
+              <a:t>GROUP COUNTS</a:t>
+            </a:r>
+          </a:p>
+          <a:p>
+            <a:r>
+              <a:rPr lang="en-US"/>
+              <a:t>Learning &amp; model integrity: 78 — Data splits · aggregation math · model bindings</a:t>
+            </a:r>
+          </a:p>
+          <a:p>
+            <a:r>
+              <a:rPr lang="en-US"/>
+              <a:t>Round control &amp; recovery: 117 — Local timer · input closure · quorum · publication</a:t>
+            </a:r>
+          </a:p>
+          <a:p>
+            <a:r>
+              <a:rPr lang="en-US"/>
+              <a:t>Identity &amp; secure transport: 240 — Admission · quotes · keys · TLS · authorization</a:t>
+            </a:r>
+          </a:p>
+          <a:p>
+            <a:r>
+              <a:rPr lang="en-US"/>
+              <a:t>Inference &amp; agent workflow: 49 — MCP tools · job ownership · TEE/ZK workflow</a:t>
+            </a:r>
+          </a:p>
+          <a:p>
+            <a:r>
+              <a:rPr lang="en-US"/>
+              <a:t>Receipts &amp; provenance: 64 — AIR / Sello / SCITT · signatures · data provenance</a:t>
+            </a:r>
+          </a:p>
+          <a:p>
+            <a:r>
+              <a:rPr lang="en-US"/>
+              <a:t>Runtime control &amp; telemetry: 107 — Configuration · upload gates · worker telemetry</a:t>
+            </a:r>
+          </a:p>
+          <a:p>
+            <a:r>
+              <a:rPr lang="en-US"/>
+              <a:t>Deployment &amp; packaging: 223 — Image policy · revision order · Docker / Terraform</a:t>
+            </a:r>
+          </a:p>
+          <a:p>
+            <a:r>
+              <a:rPr lang="en-US"/>
+              <a:t>Inventory paths are relative to presentation/concepts/test-evaluation/ci-external/.</a:t>
             </a:r>
           </a:p>
           <a:p/>
@@ -4359,7 +4545,7 @@
 
 <file path=ppt/slides/slide1.xml><?xml version="1.0" encoding="utf-8"?>
 <p:sld xmlns:a="http://schemas.openxmlformats.org/drawingml/2006/main" xmlns:p="http://schemas.openxmlformats.org/presentationml/2006/main" xmlns:r="http://schemas.openxmlformats.org/officeDocument/2006/relationships">
-  <p:cSld>
+  <p:cSld name="VITA-FL implemented test evaluation">
     <p:spTree>
       <p:nvGrpSpPr>
         <p:cNvPr id="1" name=""/>
@@ -4397,7 +4583,7 @@
                 </a:solidFill>
                 <a:latin typeface="Arial"/>
               </a:rPr>
-              <a:t>Implemented tests by test level</a:t>
+              <a:t>CI checks and external system tests</a:t>
             </a:r>
           </a:p>
         </p:txBody>
@@ -4432,7 +4618,7 @@
                 </a:solidFill>
                 <a:latin typeface="Arial"/>
               </a:rPr>
-              <a:t>EVALUATION · TEST COUNT, BOUNDARY AND EXECUTION</a:t>
+              <a:t>EVALUATION · CI COVERAGE AND EXTERNAL TEST CONFIGURATION</a:t>
             </a:r>
           </a:p>
         </p:txBody>
@@ -4510,7 +4696,7 @@
                 </a:solidFill>
                 <a:latin typeface="Arial"/>
               </a:rPr>
-              <a:t>Page 25</a:t>
+              <a:t>Page 26</a:t>
             </a:r>
           </a:p>
         </p:txBody>
@@ -4792,233 +4978,25 @@
       </p:sp>
       <p:sp>
         <p:nvSpPr>
-          <p:cNvPr id="13" name="Test evaluation: 808 implemented test definitions"/>
-          <p:cNvSpPr txBox="1"/>
-          <p:nvPr/>
-        </p:nvSpPr>
-        <p:spPr>
-          <a:xfrm>
-            <a:off x="621792" y="1380744"/>
-            <a:ext cx="6583680" cy="365760"/>
-          </a:xfrm>
-          <a:prstGeom prst="rect">
-            <a:avLst/>
-          </a:prstGeom>
-          <a:noFill/>
-        </p:spPr>
-        <p:txBody>
-          <a:bodyPr wrap="square" lIns="0" rIns="0" tIns="0" bIns="0" anchor="ctr">
-            <a:spAutoFit/>
-          </a:bodyPr>
-          <a:lstStyle/>
-          <a:p>
-            <a:pPr algn="l"/>
-            <a:r>
-              <a:rPr sz="2100" b="1" lang="en-US">
-                <a:solidFill>
-                  <a:srgbClr val="263440"/>
-                </a:solidFill>
-                <a:latin typeface="Arial"/>
-              </a:rPr>
-              <a:t>808 implemented test definitions</a:t>
-            </a:r>
-          </a:p>
-        </p:txBody>
-      </p:sp>
-      <p:sp>
-        <p:nvSpPr>
-          <p:cNvPr id="14" name="Test evaluation: Audited CI scope · current code, all profiles"/>
-          <p:cNvSpPr txBox="1"/>
-          <p:nvPr/>
-        </p:nvSpPr>
-        <p:spPr>
-          <a:xfrm>
-            <a:off x="7251192" y="1408176"/>
-            <a:ext cx="4315968" cy="310896"/>
-          </a:xfrm>
-          <a:prstGeom prst="rect">
-            <a:avLst/>
-          </a:prstGeom>
-          <a:noFill/>
-        </p:spPr>
-        <p:txBody>
-          <a:bodyPr wrap="square" lIns="0" rIns="0" tIns="0" bIns="0" anchor="ctr">
-            <a:spAutoFit/>
-          </a:bodyPr>
-          <a:lstStyle/>
-          <a:p>
-            <a:pPr algn="l"/>
-            <a:r>
-              <a:rPr sz="1200" b="0" lang="en-US">
-                <a:solidFill>
-                  <a:srgbClr val="65737D"/>
-                </a:solidFill>
-                <a:latin typeface="Arial"/>
-              </a:rPr>
-              <a:t>Audited CI scope · current code, all profiles</a:t>
-            </a:r>
-          </a:p>
-        </p:txBody>
-      </p:sp>
-      <p:sp>
-        <p:nvSpPr>
-          <p:cNvPr id="15" name="Test evaluation: TEST TYPE"/>
-          <p:cNvSpPr txBox="1"/>
-          <p:nvPr/>
-        </p:nvSpPr>
-        <p:spPr>
-          <a:xfrm>
-            <a:off x="758952" y="1874519"/>
-            <a:ext cx="2075688" cy="246888"/>
-          </a:xfrm>
-          <a:prstGeom prst="rect">
-            <a:avLst/>
-          </a:prstGeom>
-          <a:noFill/>
-        </p:spPr>
-        <p:txBody>
-          <a:bodyPr wrap="square" lIns="0" rIns="0" tIns="0" bIns="0" anchor="ctr">
-            <a:spAutoFit/>
-          </a:bodyPr>
-          <a:lstStyle/>
-          <a:p>
-            <a:pPr algn="l"/>
-            <a:r>
-              <a:rPr sz="1050" b="1" lang="en-US">
-                <a:solidFill>
-                  <a:srgbClr val="65737D"/>
-                </a:solidFill>
-                <a:latin typeface="Arial"/>
-              </a:rPr>
-              <a:t>TEST TYPE</a:t>
-            </a:r>
-          </a:p>
-        </p:txBody>
-      </p:sp>
-      <p:sp>
-        <p:nvSpPr>
-          <p:cNvPr id="16" name="Test evaluation: COUNT"/>
-          <p:cNvSpPr txBox="1"/>
-          <p:nvPr/>
-        </p:nvSpPr>
-        <p:spPr>
-          <a:xfrm>
-            <a:off x="2880360" y="1874519"/>
-            <a:ext cx="1115568" cy="246888"/>
-          </a:xfrm>
-          <a:prstGeom prst="rect">
-            <a:avLst/>
-          </a:prstGeom>
-          <a:noFill/>
-        </p:spPr>
-        <p:txBody>
-          <a:bodyPr wrap="square" lIns="0" rIns="0" tIns="0" bIns="0" anchor="ctr">
-            <a:spAutoFit/>
-          </a:bodyPr>
-          <a:lstStyle/>
-          <a:p>
-            <a:pPr algn="l"/>
-            <a:r>
-              <a:rPr sz="1050" b="1" lang="en-US">
-                <a:solidFill>
-                  <a:srgbClr val="65737D"/>
-                </a:solidFill>
-                <a:latin typeface="Arial"/>
-              </a:rPr>
-              <a:t>COUNT</a:t>
-            </a:r>
-          </a:p>
-        </p:txBody>
-      </p:sp>
-      <p:sp>
-        <p:nvSpPr>
-          <p:cNvPr id="17" name="Test evaluation: BOUNDARY / CHECKED SCOPE"/>
-          <p:cNvSpPr txBox="1"/>
-          <p:nvPr/>
-        </p:nvSpPr>
-        <p:spPr>
-          <a:xfrm>
-            <a:off x="4187952" y="1874519"/>
-            <a:ext cx="3794760" cy="246888"/>
-          </a:xfrm>
-          <a:prstGeom prst="rect">
-            <a:avLst/>
-          </a:prstGeom>
-          <a:noFill/>
-        </p:spPr>
-        <p:txBody>
-          <a:bodyPr wrap="square" lIns="0" rIns="0" tIns="0" bIns="0" anchor="ctr">
-            <a:spAutoFit/>
-          </a:bodyPr>
-          <a:lstStyle/>
-          <a:p>
-            <a:pPr algn="l"/>
-            <a:r>
-              <a:rPr sz="1050" b="1" lang="en-US">
-                <a:solidFill>
-                  <a:srgbClr val="65737D"/>
-                </a:solidFill>
-                <a:latin typeface="Arial"/>
-              </a:rPr>
-              <a:t>BOUNDARY / CHECKED SCOPE</a:t>
-            </a:r>
-          </a:p>
-        </p:txBody>
-      </p:sp>
-      <p:sp>
-        <p:nvSpPr>
-          <p:cNvPr id="18" name="Test evaluation: CONFIGURED EXECUTION"/>
-          <p:cNvSpPr txBox="1"/>
-          <p:nvPr/>
-        </p:nvSpPr>
-        <p:spPr>
-          <a:xfrm>
-            <a:off x="8211312" y="1874519"/>
-            <a:ext cx="3209544" cy="246888"/>
-          </a:xfrm>
-          <a:prstGeom prst="rect">
-            <a:avLst/>
-          </a:prstGeom>
-          <a:noFill/>
-        </p:spPr>
-        <p:txBody>
-          <a:bodyPr wrap="square" lIns="0" rIns="0" tIns="0" bIns="0" anchor="ctr">
-            <a:spAutoFit/>
-          </a:bodyPr>
-          <a:lstStyle/>
-          <a:p>
-            <a:pPr algn="l"/>
-            <a:r>
-              <a:rPr sz="1050" b="1" lang="en-US">
-                <a:solidFill>
-                  <a:srgbClr val="65737D"/>
-                </a:solidFill>
-                <a:latin typeface="Arial"/>
-              </a:rPr>
-              <a:t>CONFIGURED EXECUTION</a:t>
-            </a:r>
-          </a:p>
-        </p:txBody>
-      </p:sp>
-      <p:sp>
-        <p:nvSpPr>
-          <p:cNvPr id="19" name="Rectangle 18"/>
+          <p:cNvPr id="13" name="Rectangle 12"/>
           <p:cNvSpPr/>
           <p:nvPr/>
         </p:nvSpPr>
         <p:spPr>
           <a:xfrm>
-            <a:off x="621792" y="2194560"/>
-            <a:ext cx="10954512" cy="10972"/>
+            <a:off x="640080" y="1408176"/>
+            <a:ext cx="5312664" cy="3886200"/>
           </a:xfrm>
           <a:prstGeom prst="rect">
             <a:avLst/>
           </a:prstGeom>
           <a:solidFill>
-            <a:srgbClr val="DCE3E8"/>
+            <a:srgbClr val="FFFFFF"/>
           </a:solidFill>
-          <a:ln>
-            <a:noFill/>
+          <a:ln w="10160">
+            <a:solidFill>
+              <a:srgbClr val="DCE3E8"/>
+            </a:solidFill>
           </a:ln>
         </p:spPr>
         <p:style>
@@ -5045,24 +5023,24 @@
       </p:sp>
       <p:sp>
         <p:nvSpPr>
-          <p:cNvPr id="20" name="Rectangle 19"/>
+          <p:cNvPr id="14" name="Rectangle 13"/>
           <p:cNvSpPr/>
           <p:nvPr/>
         </p:nvSpPr>
         <p:spPr>
           <a:xfrm>
-            <a:off x="621792" y="2258568"/>
-            <a:ext cx="41148" cy="507492"/>
+            <a:off x="6126480" y="1408176"/>
+            <a:ext cx="5422392" cy="3886200"/>
           </a:xfrm>
           <a:prstGeom prst="rect">
             <a:avLst/>
           </a:prstGeom>
           <a:solidFill>
-            <a:srgbClr val="207548"/>
+            <a:srgbClr val="FFFFFF"/>
           </a:solidFill>
-          <a:ln>
+          <a:ln w="10160">
             <a:solidFill>
-              <a:srgbClr val="207548"/>
+              <a:srgbClr val="DCE3E8"/>
             </a:solidFill>
           </a:ln>
         </p:spPr>
@@ -5090,268 +5068,25 @@
       </p:sp>
       <p:sp>
         <p:nvSpPr>
-          <p:cNvPr id="21" name="Test evaluation: Unit / component"/>
-          <p:cNvSpPr txBox="1"/>
-          <p:nvPr/>
-        </p:nvSpPr>
-        <p:spPr>
-          <a:xfrm>
-            <a:off x="758952" y="2331720"/>
-            <a:ext cx="2075688" cy="384048"/>
-          </a:xfrm>
-          <a:prstGeom prst="rect">
-            <a:avLst/>
-          </a:prstGeom>
-          <a:noFill/>
-        </p:spPr>
-        <p:txBody>
-          <a:bodyPr wrap="square" lIns="0" rIns="0" tIns="0" bIns="0" anchor="ctr">
-            <a:spAutoFit/>
-          </a:bodyPr>
-          <a:lstStyle/>
-          <a:p>
-            <a:pPr algn="l"/>
-            <a:r>
-              <a:rPr sz="1400" b="1" lang="en-US">
-                <a:solidFill>
-                  <a:srgbClr val="207548"/>
-                </a:solidFill>
-                <a:latin typeface="Arial"/>
-              </a:rPr>
-              <a:t>Unit / component</a:t>
-            </a:r>
-          </a:p>
-        </p:txBody>
-      </p:sp>
-      <p:sp>
-        <p:nvSpPr>
-          <p:cNvPr id="22" name="Test evaluation: 731"/>
-          <p:cNvSpPr txBox="1"/>
-          <p:nvPr/>
-        </p:nvSpPr>
-        <p:spPr>
-          <a:xfrm>
-            <a:off x="2880360" y="2258568"/>
-            <a:ext cx="1078992" cy="365760"/>
-          </a:xfrm>
-          <a:prstGeom prst="rect">
-            <a:avLst/>
-          </a:prstGeom>
-          <a:noFill/>
-        </p:spPr>
-        <p:txBody>
-          <a:bodyPr wrap="square" lIns="0" rIns="0" tIns="0" bIns="0" anchor="ctr">
-            <a:spAutoFit/>
-          </a:bodyPr>
-          <a:lstStyle/>
-          <a:p>
-            <a:pPr algn="l"/>
-            <a:r>
-              <a:rPr sz="2300" b="1" lang="en-US">
-                <a:solidFill>
-                  <a:srgbClr val="207548"/>
-                </a:solidFill>
-                <a:latin typeface="Arial"/>
-              </a:rPr>
-              <a:t>731</a:t>
-            </a:r>
-          </a:p>
-        </p:txBody>
-      </p:sp>
-      <p:sp>
-        <p:nvSpPr>
-          <p:cNvPr id="23" name="Test evaluation: definitions"/>
-          <p:cNvSpPr txBox="1"/>
-          <p:nvPr/>
-        </p:nvSpPr>
-        <p:spPr>
-          <a:xfrm>
-            <a:off x="2880360" y="2619756"/>
-            <a:ext cx="1133856" cy="192024"/>
-          </a:xfrm>
-          <a:prstGeom prst="rect">
-            <a:avLst/>
-          </a:prstGeom>
-          <a:noFill/>
-        </p:spPr>
-        <p:txBody>
-          <a:bodyPr wrap="square" lIns="0" rIns="0" tIns="0" bIns="0" anchor="ctr">
-            <a:spAutoFit/>
-          </a:bodyPr>
-          <a:lstStyle/>
-          <a:p>
-            <a:pPr algn="l"/>
-            <a:r>
-              <a:rPr sz="1050" b="0" lang="en-US">
-                <a:solidFill>
-                  <a:srgbClr val="65737D"/>
-                </a:solidFill>
-                <a:latin typeface="Arial"/>
-              </a:rPr>
-              <a:t>definitions</a:t>
-            </a:r>
-          </a:p>
-        </p:txBody>
-      </p:sp>
-      <p:sp>
-        <p:nvSpPr>
-          <p:cNvPr id="24" name="Test evaluation: Functions and contract logic"/>
-          <p:cNvSpPr txBox="1"/>
-          <p:nvPr/>
-        </p:nvSpPr>
-        <p:spPr>
-          <a:xfrm>
-            <a:off x="4187952" y="2281428"/>
-            <a:ext cx="3813048" cy="246888"/>
-          </a:xfrm>
-          <a:prstGeom prst="rect">
-            <a:avLst/>
-          </a:prstGeom>
-          <a:noFill/>
-        </p:spPr>
-        <p:txBody>
-          <a:bodyPr wrap="square" lIns="0" rIns="0" tIns="0" bIns="0" anchor="ctr">
-            <a:spAutoFit/>
-          </a:bodyPr>
-          <a:lstStyle/>
-          <a:p>
-            <a:pPr algn="l"/>
-            <a:r>
-              <a:rPr sz="1400" b="1" lang="en-US">
-                <a:solidFill>
-                  <a:srgbClr val="263440"/>
-                </a:solidFill>
-                <a:latin typeface="Arial"/>
-              </a:rPr>
-              <a:t>Functions and contract logic</a:t>
-            </a:r>
-          </a:p>
-        </p:txBody>
-      </p:sp>
-      <p:sp>
-        <p:nvSpPr>
-          <p:cNvPr id="25" name="Test evaluation: Validation · signatures · state guards"/>
-          <p:cNvSpPr txBox="1"/>
-          <p:nvPr/>
-        </p:nvSpPr>
-        <p:spPr>
-          <a:xfrm>
-            <a:off x="4187952" y="2560320"/>
-            <a:ext cx="3813048" cy="219456"/>
-          </a:xfrm>
-          <a:prstGeom prst="rect">
-            <a:avLst/>
-          </a:prstGeom>
-          <a:noFill/>
-        </p:spPr>
-        <p:txBody>
-          <a:bodyPr wrap="square" lIns="0" rIns="0" tIns="0" bIns="0" anchor="ctr">
-            <a:spAutoFit/>
-          </a:bodyPr>
-          <a:lstStyle/>
-          <a:p>
-            <a:pPr algn="l"/>
-            <a:r>
-              <a:rPr sz="1150" b="0" lang="en-US">
-                <a:solidFill>
-                  <a:srgbClr val="65737D"/>
-                </a:solidFill>
-                <a:latin typeface="Arial"/>
-              </a:rPr>
-              <a:t>Validation · signatures · state guards</a:t>
-            </a:r>
-          </a:p>
-        </p:txBody>
-      </p:sp>
-      <p:sp>
-        <p:nvSpPr>
-          <p:cNvPr id="26" name="Test evaluation: CI · GitHub Actions"/>
-          <p:cNvSpPr txBox="1"/>
-          <p:nvPr/>
-        </p:nvSpPr>
-        <p:spPr>
-          <a:xfrm>
-            <a:off x="8211312" y="2281428"/>
-            <a:ext cx="3218688" cy="246888"/>
-          </a:xfrm>
-          <a:prstGeom prst="rect">
-            <a:avLst/>
-          </a:prstGeom>
-          <a:noFill/>
-        </p:spPr>
-        <p:txBody>
-          <a:bodyPr wrap="square" lIns="0" rIns="0" tIns="0" bIns="0" anchor="ctr">
-            <a:spAutoFit/>
-          </a:bodyPr>
-          <a:lstStyle/>
-          <a:p>
-            <a:pPr algn="l"/>
-            <a:r>
-              <a:rPr sz="1400" b="1" lang="en-US">
-                <a:solidFill>
-                  <a:srgbClr val="207548"/>
-                </a:solidFill>
-                <a:latin typeface="Arial"/>
-              </a:rPr>
-              <a:t>CI · GitHub Actions</a:t>
-            </a:r>
-          </a:p>
-        </p:txBody>
-      </p:sp>
-      <p:sp>
-        <p:nvSpPr>
-          <p:cNvPr id="27" name="Test evaluation: Python / Node.js / Foundry"/>
-          <p:cNvSpPr txBox="1"/>
-          <p:nvPr/>
-        </p:nvSpPr>
-        <p:spPr>
-          <a:xfrm>
-            <a:off x="8211312" y="2560320"/>
-            <a:ext cx="3218688" cy="219456"/>
-          </a:xfrm>
-          <a:prstGeom prst="rect">
-            <a:avLst/>
-          </a:prstGeom>
-          <a:noFill/>
-        </p:spPr>
-        <p:txBody>
-          <a:bodyPr wrap="square" lIns="0" rIns="0" tIns="0" bIns="0" anchor="ctr">
-            <a:spAutoFit/>
-          </a:bodyPr>
-          <a:lstStyle/>
-          <a:p>
-            <a:pPr algn="l"/>
-            <a:r>
-              <a:rPr sz="1050" b="0" lang="en-US">
-                <a:solidFill>
-                  <a:srgbClr val="65737D"/>
-                </a:solidFill>
-                <a:latin typeface="Arial"/>
-              </a:rPr>
-              <a:t>Python / Node.js / Foundry</a:t>
-            </a:r>
-          </a:p>
-        </p:txBody>
-      </p:sp>
-      <p:sp>
-        <p:nvSpPr>
-          <p:cNvPr id="28" name="Rectangle 27"/>
+          <p:cNvPr id="15" name="Rectangle 14"/>
           <p:cNvSpPr/>
           <p:nvPr/>
         </p:nvSpPr>
         <p:spPr>
           <a:xfrm>
-            <a:off x="758952" y="2816352"/>
-            <a:ext cx="10789920" cy="10972"/>
+            <a:off x="640080" y="1408176"/>
+            <a:ext cx="5312664" cy="640080"/>
           </a:xfrm>
           <a:prstGeom prst="rect">
             <a:avLst/>
           </a:prstGeom>
           <a:solidFill>
-            <a:srgbClr val="DCE3E8"/>
+            <a:srgbClr val="EDF4FA"/>
           </a:solidFill>
-          <a:ln>
-            <a:noFill/>
+          <a:ln w="10160">
+            <a:solidFill>
+              <a:srgbClr val="EDF4FA"/>
+            </a:solidFill>
           </a:ln>
         </p:spPr>
         <p:style>
@@ -5378,24 +5113,24 @@
       </p:sp>
       <p:sp>
         <p:nvSpPr>
-          <p:cNvPr id="29" name="Rectangle 28"/>
+          <p:cNvPr id="16" name="Rectangle 15"/>
           <p:cNvSpPr/>
           <p:nvPr/>
         </p:nvSpPr>
         <p:spPr>
           <a:xfrm>
-            <a:off x="621792" y="2843784"/>
-            <a:ext cx="41148" cy="507492"/>
+            <a:off x="6126480" y="1408176"/>
+            <a:ext cx="5422392" cy="640080"/>
           </a:xfrm>
           <a:prstGeom prst="rect">
             <a:avLst/>
           </a:prstGeom>
           <a:solidFill>
-            <a:srgbClr val="1764A1"/>
+            <a:srgbClr val="F3EEF8"/>
           </a:solidFill>
-          <a:ln>
+          <a:ln w="10160">
             <a:solidFill>
-              <a:srgbClr val="1764A1"/>
+              <a:srgbClr val="F3EEF8"/>
             </a:solidFill>
           </a:ln>
         </p:spPr>
@@ -5423,14 +5158,14 @@
       </p:sp>
       <p:sp>
         <p:nvSpPr>
-          <p:cNvPr id="30" name="Test evaluation: Integration"/>
+          <p:cNvPr id="17" name="CI/external scope: CI · 878 definitions"/>
           <p:cNvSpPr txBox="1"/>
           <p:nvPr/>
         </p:nvSpPr>
         <p:spPr>
           <a:xfrm>
-            <a:off x="758952" y="2916936"/>
-            <a:ext cx="2075688" cy="384048"/>
+            <a:off x="832104" y="1490472"/>
+            <a:ext cx="4928616" cy="329184"/>
           </a:xfrm>
           <a:prstGeom prst="rect">
             <a:avLst/>
@@ -5445,27 +5180,27 @@
           <a:p>
             <a:pPr algn="l"/>
             <a:r>
-              <a:rPr sz="1400" b="1" lang="en-US">
+              <a:rPr sz="2100" b="1" lang="en-US">
                 <a:solidFill>
                   <a:srgbClr val="1764A1"/>
                 </a:solidFill>
                 <a:latin typeface="Arial"/>
               </a:rPr>
-              <a:t>Integration</a:t>
+              <a:t>CI · 878 definitions</a:t>
             </a:r>
           </a:p>
         </p:txBody>
       </p:sp>
       <p:sp>
         <p:nvSpPr>
-          <p:cNvPr id="31" name="Test evaluation: 77"/>
+          <p:cNvPr id="18" name="CI/external scope: Unit / component / integration · GitHub Actions"/>
           <p:cNvSpPr txBox="1"/>
           <p:nvPr/>
         </p:nvSpPr>
         <p:spPr>
           <a:xfrm>
-            <a:off x="2880360" y="2843784"/>
-            <a:ext cx="1078992" cy="365760"/>
+            <a:off x="832104" y="1865376"/>
+            <a:ext cx="4928616" cy="219456"/>
           </a:xfrm>
           <a:prstGeom prst="rect">
             <a:avLst/>
@@ -5480,27 +5215,27 @@
           <a:p>
             <a:pPr algn="l"/>
             <a:r>
-              <a:rPr sz="2300" b="1" lang="en-US">
+              <a:rPr sz="1130" b="0" lang="en-US">
                 <a:solidFill>
                   <a:srgbClr val="1764A1"/>
                 </a:solidFill>
                 <a:latin typeface="Arial"/>
               </a:rPr>
-              <a:t>77</a:t>
+              <a:t>Unit / component / integration · GitHub Actions</a:t>
             </a:r>
           </a:p>
         </p:txBody>
       </p:sp>
       <p:sp>
         <p:nvSpPr>
-          <p:cNvPr id="32" name="Test evaluation: definitions"/>
+          <p:cNvPr id="19" name="CI/external scope: External · 8 modes + audit"/>
           <p:cNvSpPr txBox="1"/>
           <p:nvPr/>
         </p:nvSpPr>
         <p:spPr>
           <a:xfrm>
-            <a:off x="2880360" y="3204972"/>
-            <a:ext cx="1133856" cy="192024"/>
+            <a:off x="6318504" y="1490472"/>
+            <a:ext cx="5029200" cy="329184"/>
           </a:xfrm>
           <a:prstGeom prst="rect">
             <a:avLst/>
@@ -5515,27 +5250,27 @@
           <a:p>
             <a:pPr algn="l"/>
             <a:r>
-              <a:rPr sz="1050" b="0" lang="en-US">
+              <a:rPr sz="2100" b="1" lang="en-US">
                 <a:solidFill>
-                  <a:srgbClr val="65737D"/>
+                  <a:srgbClr val="7446A6"/>
                 </a:solidFill>
                 <a:latin typeface="Arial"/>
               </a:rPr>
-              <a:t>definitions</a:t>
+              <a:t>External · 8 modes + audit</a:t>
             </a:r>
           </a:p>
         </p:txBody>
       </p:sp>
       <p:sp>
         <p:nvSpPr>
-          <p:cNvPr id="33" name="Test evaluation: Real local interfaces"/>
+          <p:cNvPr id="20" name="CI/external scope: SMEW → SMA → vita-fl-td · deployed VITA-FL in Phala"/>
           <p:cNvSpPr txBox="1"/>
           <p:nvPr/>
         </p:nvSpPr>
         <p:spPr>
           <a:xfrm>
-            <a:off x="4187952" y="2866644"/>
-            <a:ext cx="3813048" cy="246888"/>
+            <a:off x="6318504" y="1865376"/>
+            <a:ext cx="5029200" cy="219456"/>
           </a:xfrm>
           <a:prstGeom prst="rect">
             <a:avLst/>
@@ -5550,27 +5285,62 @@
           <a:p>
             <a:pPr algn="l"/>
             <a:r>
+              <a:rPr sz="1130" b="0" lang="en-US">
+                <a:solidFill>
+                  <a:srgbClr val="7446A6"/>
+                </a:solidFill>
+                <a:latin typeface="Arial"/>
+              </a:rPr>
+              <a:t>SMEW → SMA → vita-fl-td · deployed VITA-FL in Phala</a:t>
+            </a:r>
+          </a:p>
+        </p:txBody>
+      </p:sp>
+      <p:sp>
+        <p:nvSpPr>
+          <p:cNvPr id="21" name="CI/external scope: Learning &amp; model integrity"/>
+          <p:cNvSpPr txBox="1"/>
+          <p:nvPr/>
+        </p:nvSpPr>
+        <p:spPr>
+          <a:xfrm>
+            <a:off x="832104" y="2148840"/>
+            <a:ext cx="4215384" cy="246888"/>
+          </a:xfrm>
+          <a:prstGeom prst="rect">
+            <a:avLst/>
+          </a:prstGeom>
+          <a:noFill/>
+        </p:spPr>
+        <p:txBody>
+          <a:bodyPr wrap="square" lIns="0" rIns="0" tIns="0" bIns="0" anchor="ctr">
+            <a:spAutoFit/>
+          </a:bodyPr>
+          <a:lstStyle/>
+          <a:p>
+            <a:pPr algn="l"/>
+            <a:r>
               <a:rPr sz="1400" b="1" lang="en-US">
                 <a:solidFill>
                   <a:srgbClr val="263440"/>
                 </a:solidFill>
                 <a:latin typeface="Arial"/>
               </a:rPr>
-              <a:t>Real local interfaces</a:t>
+              <a:t>Learning &amp; model integrity</a:t>
             </a:r>
           </a:p>
         </p:txBody>
       </p:sp>
       <p:sp>
         <p:nvSpPr>
-          <p:cNvPr id="34" name="Test evaluation: HTTP/TLS · contracts · external tools"/>
+          <p:cNvPr id="22" name="CI/external scope: Data splits · aggregation math · model bindings"/>
           <p:cNvSpPr txBox="1"/>
           <p:nvPr/>
         </p:nvSpPr>
         <p:spPr>
           <a:xfrm>
-            <a:off x="4187952" y="3145536"/>
-            <a:ext cx="3813048" cy="219456"/>
+            <a:off x="832104" y="2382012"/>
+            <a:ext cx="4462272" cy="210312"/>
           </a:xfrm>
           <a:prstGeom prst="rect">
             <a:avLst/>
@@ -5585,27 +5355,27 @@
           <a:p>
             <a:pPr algn="l"/>
             <a:r>
-              <a:rPr sz="1150" b="0" lang="en-US">
+              <a:rPr sz="1120" b="0" lang="en-US">
                 <a:solidFill>
                   <a:srgbClr val="65737D"/>
                 </a:solidFill>
                 <a:latin typeface="Arial"/>
               </a:rPr>
-              <a:t>HTTP/TLS · contracts · external tools</a:t>
+              <a:t>Data splits · aggregation math · model bindings</a:t>
             </a:r>
           </a:p>
         </p:txBody>
       </p:sp>
       <p:sp>
         <p:nvSpPr>
-          <p:cNvPr id="35" name="Test evaluation: CI · GitHub Actions"/>
+          <p:cNvPr id="23" name="CI/external scope: 78"/>
           <p:cNvSpPr txBox="1"/>
           <p:nvPr/>
         </p:nvSpPr>
         <p:spPr>
           <a:xfrm>
-            <a:off x="8211312" y="2866644"/>
-            <a:ext cx="3218688" cy="246888"/>
+            <a:off x="5230368" y="2185416"/>
+            <a:ext cx="502920" cy="310896"/>
           </a:xfrm>
           <a:prstGeom prst="rect">
             <a:avLst/>
@@ -5618,29 +5388,64 @@
           </a:bodyPr>
           <a:lstStyle/>
           <a:p>
-            <a:pPr algn="l"/>
-            <a:r>
-              <a:rPr sz="1400" b="1" lang="en-US">
+            <a:pPr algn="ctr"/>
+            <a:r>
+              <a:rPr sz="1800" b="1" lang="en-US">
                 <a:solidFill>
                   <a:srgbClr val="1764A1"/>
                 </a:solidFill>
                 <a:latin typeface="Arial"/>
               </a:rPr>
-              <a:t>CI · GitHub Actions</a:t>
+              <a:t>78</a:t>
             </a:r>
           </a:p>
         </p:txBody>
       </p:sp>
-      <p:sp>
-        <p:nvSpPr>
-          <p:cNvPr id="36" name="Test evaluation: Local services, binaries and EVM"/>
+      <p:cxnSp>
+        <p:nvCxnSpPr>
+          <p:cNvPr id="24" name="Connector 23"/>
+          <p:cNvCxnSpPr/>
+          <p:nvPr/>
+        </p:nvCxnSpPr>
+        <p:spPr>
+          <a:xfrm>
+            <a:off x="832104" y="2583180"/>
+            <a:ext cx="4901184" cy="0"/>
+          </a:xfrm>
+          <a:prstGeom prst="line">
+            <a:avLst/>
+          </a:prstGeom>
+          <a:ln w="8890">
+            <a:solidFill>
+              <a:srgbClr val="DCE3E8"/>
+            </a:solidFill>
+          </a:ln>
+        </p:spPr>
+        <p:style>
+          <a:lnRef idx="2">
+            <a:schemeClr val="accent1"/>
+          </a:lnRef>
+          <a:fillRef idx="0">
+            <a:schemeClr val="accent1"/>
+          </a:fillRef>
+          <a:effectRef idx="1">
+            <a:schemeClr val="accent1"/>
+          </a:effectRef>
+          <a:fontRef idx="minor">
+            <a:schemeClr val="tx1"/>
+          </a:fontRef>
+        </p:style>
+      </p:cxnSp>
+      <p:sp>
+        <p:nvSpPr>
+          <p:cNvPr id="25" name="CI/external scope: Round control &amp; recovery"/>
           <p:cNvSpPr txBox="1"/>
           <p:nvPr/>
         </p:nvSpPr>
         <p:spPr>
           <a:xfrm>
-            <a:off x="8211312" y="3145536"/>
-            <a:ext cx="3218688" cy="219456"/>
+            <a:off x="832104" y="2587752"/>
+            <a:ext cx="4215384" cy="246888"/>
           </a:xfrm>
           <a:prstGeom prst="rect">
             <a:avLst/>
@@ -5655,115 +5460,27 @@
           <a:p>
             <a:pPr algn="l"/>
             <a:r>
-              <a:rPr sz="1050" b="0" lang="en-US">
+              <a:rPr sz="1400" b="1" lang="en-US">
                 <a:solidFill>
-                  <a:srgbClr val="65737D"/>
+                  <a:srgbClr val="263440"/>
                 </a:solidFill>
                 <a:latin typeface="Arial"/>
               </a:rPr>
-              <a:t>Local services, binaries and EVM</a:t>
+              <a:t>Round control &amp; recovery</a:t>
             </a:r>
           </a:p>
         </p:txBody>
       </p:sp>
       <p:sp>
         <p:nvSpPr>
-          <p:cNvPr id="37" name="Rectangle 36"/>
-          <p:cNvSpPr/>
-          <p:nvPr/>
-        </p:nvSpPr>
-        <p:spPr>
-          <a:xfrm>
-            <a:off x="758952" y="3401568"/>
-            <a:ext cx="10789920" cy="10972"/>
-          </a:xfrm>
-          <a:prstGeom prst="rect">
-            <a:avLst/>
-          </a:prstGeom>
-          <a:solidFill>
-            <a:srgbClr val="DCE3E8"/>
-          </a:solidFill>
-          <a:ln>
-            <a:noFill/>
-          </a:ln>
-        </p:spPr>
-        <p:style>
-          <a:lnRef idx="1">
-            <a:schemeClr val="accent1"/>
-          </a:lnRef>
-          <a:fillRef idx="3">
-            <a:schemeClr val="accent1"/>
-          </a:fillRef>
-          <a:effectRef idx="2">
-            <a:schemeClr val="accent1"/>
-          </a:effectRef>
-          <a:fontRef idx="minor">
-            <a:schemeClr val="lt1"/>
-          </a:fontRef>
-        </p:style>
-        <p:txBody>
-          <a:bodyPr rtlCol="0" anchor="ctr"/>
-          <a:lstStyle/>
-          <a:p>
-            <a:pPr algn="ctr"/>
-          </a:p>
-        </p:txBody>
-      </p:sp>
-      <p:sp>
-        <p:nvSpPr>
-          <p:cNvPr id="38" name="Rectangle 37"/>
-          <p:cNvSpPr/>
-          <p:nvPr/>
-        </p:nvSpPr>
-        <p:spPr>
-          <a:xfrm>
-            <a:off x="621792" y="3429000"/>
-            <a:ext cx="41148" cy="507492"/>
-          </a:xfrm>
-          <a:prstGeom prst="rect">
-            <a:avLst/>
-          </a:prstGeom>
-          <a:solidFill>
-            <a:srgbClr val="7446A6"/>
-          </a:solidFill>
-          <a:ln>
-            <a:solidFill>
-              <a:srgbClr val="7446A6"/>
-            </a:solidFill>
-          </a:ln>
-        </p:spPr>
-        <p:style>
-          <a:lnRef idx="1">
-            <a:schemeClr val="accent1"/>
-          </a:lnRef>
-          <a:fillRef idx="3">
-            <a:schemeClr val="accent1"/>
-          </a:fillRef>
-          <a:effectRef idx="2">
-            <a:schemeClr val="accent1"/>
-          </a:effectRef>
-          <a:fontRef idx="minor">
-            <a:schemeClr val="lt1"/>
-          </a:fontRef>
-        </p:style>
-        <p:txBody>
-          <a:bodyPr rtlCol="0" anchor="ctr"/>
-          <a:lstStyle/>
-          <a:p>
-            <a:pPr algn="ctr"/>
-          </a:p>
-        </p:txBody>
-      </p:sp>
-      <p:sp>
-        <p:nvSpPr>
-          <p:cNvPr id="39" name="Test evaluation: System / end-to-end"/>
+          <p:cNvPr id="26" name="CI/external scope: Local timer · input closure · quorum · publication"/>
           <p:cNvSpPr txBox="1"/>
           <p:nvPr/>
         </p:nvSpPr>
         <p:spPr>
           <a:xfrm>
-            <a:off x="758952" y="3502152"/>
-            <a:ext cx="2075688" cy="384048"/>
+            <a:off x="832104" y="2820924"/>
+            <a:ext cx="4462272" cy="210312"/>
           </a:xfrm>
           <a:prstGeom prst="rect">
             <a:avLst/>
@@ -5778,27 +5495,27 @@
           <a:p>
             <a:pPr algn="l"/>
             <a:r>
-              <a:rPr sz="1400" b="1" lang="en-US">
+              <a:rPr sz="1120" b="0" lang="en-US">
                 <a:solidFill>
-                  <a:srgbClr val="7446A6"/>
+                  <a:srgbClr val="65737D"/>
                 </a:solidFill>
                 <a:latin typeface="Arial"/>
               </a:rPr>
-              <a:t>System / end-to-end</a:t>
+              <a:t>Local timer · input closure · quorum · publication</a:t>
             </a:r>
           </a:p>
         </p:txBody>
       </p:sp>
       <p:sp>
         <p:nvSpPr>
-          <p:cNvPr id="40" name="Test evaluation: 0"/>
+          <p:cNvPr id="27" name="CI/external scope: 117"/>
           <p:cNvSpPr txBox="1"/>
           <p:nvPr/>
         </p:nvSpPr>
         <p:spPr>
           <a:xfrm>
-            <a:off x="2880360" y="3429000"/>
-            <a:ext cx="1078992" cy="365760"/>
+            <a:off x="5230368" y="2624328"/>
+            <a:ext cx="502920" cy="310896"/>
           </a:xfrm>
           <a:prstGeom prst="rect">
             <a:avLst/>
@@ -5811,29 +5528,64 @@
           </a:bodyPr>
           <a:lstStyle/>
           <a:p>
-            <a:pPr algn="l"/>
-            <a:r>
-              <a:rPr sz="2300" b="1" lang="en-US">
+            <a:pPr algn="ctr"/>
+            <a:r>
+              <a:rPr sz="1800" b="1" lang="en-US">
                 <a:solidFill>
-                  <a:srgbClr val="7446A6"/>
+                  <a:srgbClr val="1764A1"/>
                 </a:solidFill>
                 <a:latin typeface="Arial"/>
               </a:rPr>
-              <a:t>0</a:t>
+              <a:t>117</a:t>
             </a:r>
           </a:p>
         </p:txBody>
       </p:sp>
-      <p:sp>
-        <p:nvSpPr>
-          <p:cNvPr id="41" name="Test evaluation: automated"/>
+      <p:cxnSp>
+        <p:nvCxnSpPr>
+          <p:cNvPr id="28" name="Connector 27"/>
+          <p:cNvCxnSpPr/>
+          <p:nvPr/>
+        </p:nvCxnSpPr>
+        <p:spPr>
+          <a:xfrm>
+            <a:off x="832104" y="3022092"/>
+            <a:ext cx="4901184" cy="0"/>
+          </a:xfrm>
+          <a:prstGeom prst="line">
+            <a:avLst/>
+          </a:prstGeom>
+          <a:ln w="8890">
+            <a:solidFill>
+              <a:srgbClr val="DCE3E8"/>
+            </a:solidFill>
+          </a:ln>
+        </p:spPr>
+        <p:style>
+          <a:lnRef idx="2">
+            <a:schemeClr val="accent1"/>
+          </a:lnRef>
+          <a:fillRef idx="0">
+            <a:schemeClr val="accent1"/>
+          </a:fillRef>
+          <a:effectRef idx="1">
+            <a:schemeClr val="accent1"/>
+          </a:effectRef>
+          <a:fontRef idx="minor">
+            <a:schemeClr val="tx1"/>
+          </a:fontRef>
+        </p:style>
+      </p:cxnSp>
+      <p:sp>
+        <p:nvSpPr>
+          <p:cNvPr id="29" name="CI/external scope: Identity &amp; secure transport"/>
           <p:cNvSpPr txBox="1"/>
           <p:nvPr/>
         </p:nvSpPr>
         <p:spPr>
           <a:xfrm>
-            <a:off x="2880360" y="3790187"/>
-            <a:ext cx="1133856" cy="192024"/>
+            <a:off x="832104" y="3026664"/>
+            <a:ext cx="4215384" cy="246888"/>
           </a:xfrm>
           <a:prstGeom prst="rect">
             <a:avLst/>
@@ -5848,27 +5600,27 @@
           <a:p>
             <a:pPr algn="l"/>
             <a:r>
-              <a:rPr sz="1050" b="0" lang="en-US">
+              <a:rPr sz="1400" b="1" lang="en-US">
                 <a:solidFill>
-                  <a:srgbClr val="65737D"/>
+                  <a:srgbClr val="263440"/>
                 </a:solidFill>
                 <a:latin typeface="Arial"/>
               </a:rPr>
-              <a:t>automated</a:t>
+              <a:t>Identity &amp; secure transport</a:t>
             </a:r>
           </a:p>
         </p:txBody>
       </p:sp>
       <p:sp>
         <p:nvSpPr>
-          <p:cNvPr id="42" name="Test evaluation: Complete deployed workflow"/>
+          <p:cNvPr id="30" name="CI/external scope: Admission · quotes · keys · TLS · authorization"/>
           <p:cNvSpPr txBox="1"/>
           <p:nvPr/>
         </p:nvSpPr>
         <p:spPr>
           <a:xfrm>
-            <a:off x="4187952" y="3451860"/>
-            <a:ext cx="3813048" cy="246888"/>
+            <a:off x="832104" y="3259836"/>
+            <a:ext cx="4462272" cy="210312"/>
           </a:xfrm>
           <a:prstGeom prst="rect">
             <a:avLst/>
@@ -5883,27 +5635,132 @@
           <a:p>
             <a:pPr algn="l"/>
             <a:r>
+              <a:rPr sz="1120" b="0" lang="en-US">
+                <a:solidFill>
+                  <a:srgbClr val="65737D"/>
+                </a:solidFill>
+                <a:latin typeface="Arial"/>
+              </a:rPr>
+              <a:t>Admission · quotes · keys · TLS · authorization</a:t>
+            </a:r>
+          </a:p>
+        </p:txBody>
+      </p:sp>
+      <p:sp>
+        <p:nvSpPr>
+          <p:cNvPr id="31" name="CI/external scope: 240"/>
+          <p:cNvSpPr txBox="1"/>
+          <p:nvPr/>
+        </p:nvSpPr>
+        <p:spPr>
+          <a:xfrm>
+            <a:off x="5230368" y="3063240"/>
+            <a:ext cx="502920" cy="310896"/>
+          </a:xfrm>
+          <a:prstGeom prst="rect">
+            <a:avLst/>
+          </a:prstGeom>
+          <a:noFill/>
+        </p:spPr>
+        <p:txBody>
+          <a:bodyPr wrap="square" lIns="0" rIns="0" tIns="0" bIns="0" anchor="ctr">
+            <a:spAutoFit/>
+          </a:bodyPr>
+          <a:lstStyle/>
+          <a:p>
+            <a:pPr algn="ctr"/>
+            <a:r>
+              <a:rPr sz="1800" b="1" lang="en-US">
+                <a:solidFill>
+                  <a:srgbClr val="1764A1"/>
+                </a:solidFill>
+                <a:latin typeface="Arial"/>
+              </a:rPr>
+              <a:t>240</a:t>
+            </a:r>
+          </a:p>
+        </p:txBody>
+      </p:sp>
+      <p:cxnSp>
+        <p:nvCxnSpPr>
+          <p:cNvPr id="32" name="Connector 31"/>
+          <p:cNvCxnSpPr/>
+          <p:nvPr/>
+        </p:nvCxnSpPr>
+        <p:spPr>
+          <a:xfrm>
+            <a:off x="832104" y="3461004"/>
+            <a:ext cx="4901184" cy="0"/>
+          </a:xfrm>
+          <a:prstGeom prst="line">
+            <a:avLst/>
+          </a:prstGeom>
+          <a:ln w="8890">
+            <a:solidFill>
+              <a:srgbClr val="DCE3E8"/>
+            </a:solidFill>
+          </a:ln>
+        </p:spPr>
+        <p:style>
+          <a:lnRef idx="2">
+            <a:schemeClr val="accent1"/>
+          </a:lnRef>
+          <a:fillRef idx="0">
+            <a:schemeClr val="accent1"/>
+          </a:fillRef>
+          <a:effectRef idx="1">
+            <a:schemeClr val="accent1"/>
+          </a:effectRef>
+          <a:fontRef idx="minor">
+            <a:schemeClr val="tx1"/>
+          </a:fontRef>
+        </p:style>
+      </p:cxnSp>
+      <p:sp>
+        <p:nvSpPr>
+          <p:cNvPr id="33" name="CI/external scope: Inference &amp; agent workflow"/>
+          <p:cNvSpPr txBox="1"/>
+          <p:nvPr/>
+        </p:nvSpPr>
+        <p:spPr>
+          <a:xfrm>
+            <a:off x="832104" y="3465576"/>
+            <a:ext cx="4215384" cy="246888"/>
+          </a:xfrm>
+          <a:prstGeom prst="rect">
+            <a:avLst/>
+          </a:prstGeom>
+          <a:noFill/>
+        </p:spPr>
+        <p:txBody>
+          <a:bodyPr wrap="square" lIns="0" rIns="0" tIns="0" bIns="0" anchor="ctr">
+            <a:spAutoFit/>
+          </a:bodyPr>
+          <a:lstStyle/>
+          <a:p>
+            <a:pPr algn="l"/>
+            <a:r>
               <a:rPr sz="1400" b="1" lang="en-US">
                 <a:solidFill>
                   <a:srgbClr val="263440"/>
                 </a:solidFill>
                 <a:latin typeface="Arial"/>
               </a:rPr>
-              <a:t>Complete deployed workflow</a:t>
+              <a:t>Inference &amp; agent workflow</a:t>
             </a:r>
           </a:p>
         </p:txBody>
       </p:sp>
       <p:sp>
         <p:nvSpPr>
-          <p:cNvPr id="43" name="Test evaluation: Training → publication → inference"/>
+          <p:cNvPr id="34" name="CI/external scope: MCP tools · job ownership · TEE/ZK workflow"/>
           <p:cNvSpPr txBox="1"/>
           <p:nvPr/>
         </p:nvSpPr>
         <p:spPr>
           <a:xfrm>
-            <a:off x="4187952" y="3730752"/>
-            <a:ext cx="3813048" cy="219456"/>
+            <a:off x="832104" y="3698748"/>
+            <a:ext cx="4462272" cy="210312"/>
           </a:xfrm>
           <a:prstGeom prst="rect">
             <a:avLst/>
@@ -5918,27 +5775,27 @@
           <a:p>
             <a:pPr algn="l"/>
             <a:r>
-              <a:rPr sz="1150" b="0" lang="en-US">
+              <a:rPr sz="1120" b="0" lang="en-US">
                 <a:solidFill>
                   <a:srgbClr val="65737D"/>
                 </a:solidFill>
                 <a:latin typeface="Arial"/>
               </a:rPr>
-              <a:t>Training → publication → inference</a:t>
+              <a:t>MCP tools · job ownership · TEE/ZK workflow</a:t>
             </a:r>
           </a:p>
         </p:txBody>
       </p:sp>
       <p:sp>
         <p:nvSpPr>
-          <p:cNvPr id="44" name="Test evaluation: 1 separate Phala run"/>
+          <p:cNvPr id="35" name="CI/external scope: 49"/>
           <p:cNvSpPr txBox="1"/>
           <p:nvPr/>
         </p:nvSpPr>
         <p:spPr>
           <a:xfrm>
-            <a:off x="8211312" y="3451860"/>
-            <a:ext cx="3218688" cy="246888"/>
+            <a:off x="5230368" y="3502152"/>
+            <a:ext cx="502920" cy="310896"/>
           </a:xfrm>
           <a:prstGeom prst="rect">
             <a:avLst/>
@@ -5951,29 +5808,64 @@
           </a:bodyPr>
           <a:lstStyle/>
           <a:p>
-            <a:pPr algn="l"/>
-            <a:r>
-              <a:rPr sz="1400" b="1" lang="en-US">
+            <a:pPr algn="ctr"/>
+            <a:r>
+              <a:rPr sz="1800" b="1" lang="en-US">
                 <a:solidFill>
-                  <a:srgbClr val="7446A6"/>
+                  <a:srgbClr val="1764A1"/>
                 </a:solidFill>
                 <a:latin typeface="Arial"/>
               </a:rPr>
-              <a:t>1 separate Phala run</a:t>
+              <a:t>49</a:t>
             </a:r>
           </a:p>
         </p:txBody>
       </p:sp>
-      <p:sp>
-        <p:nvSpPr>
-          <p:cNvPr id="45" name="Test evaluation: 6 workers · 24 rounds + final inference"/>
+      <p:cxnSp>
+        <p:nvCxnSpPr>
+          <p:cNvPr id="36" name="Connector 35"/>
+          <p:cNvCxnSpPr/>
+          <p:nvPr/>
+        </p:nvCxnSpPr>
+        <p:spPr>
+          <a:xfrm>
+            <a:off x="832104" y="3899915"/>
+            <a:ext cx="4901184" cy="0"/>
+          </a:xfrm>
+          <a:prstGeom prst="line">
+            <a:avLst/>
+          </a:prstGeom>
+          <a:ln w="8890">
+            <a:solidFill>
+              <a:srgbClr val="DCE3E8"/>
+            </a:solidFill>
+          </a:ln>
+        </p:spPr>
+        <p:style>
+          <a:lnRef idx="2">
+            <a:schemeClr val="accent1"/>
+          </a:lnRef>
+          <a:fillRef idx="0">
+            <a:schemeClr val="accent1"/>
+          </a:fillRef>
+          <a:effectRef idx="1">
+            <a:schemeClr val="accent1"/>
+          </a:effectRef>
+          <a:fontRef idx="minor">
+            <a:schemeClr val="tx1"/>
+          </a:fontRef>
+        </p:style>
+      </p:cxnSp>
+      <p:sp>
+        <p:nvSpPr>
+          <p:cNvPr id="37" name="CI/external scope: Receipts &amp; provenance"/>
           <p:cNvSpPr txBox="1"/>
           <p:nvPr/>
         </p:nvSpPr>
         <p:spPr>
           <a:xfrm>
-            <a:off x="8211312" y="3730752"/>
-            <a:ext cx="3218688" cy="219456"/>
+            <a:off x="832104" y="3904487"/>
+            <a:ext cx="4215384" cy="246888"/>
           </a:xfrm>
           <a:prstGeom prst="rect">
             <a:avLst/>
@@ -5988,115 +5880,27 @@
           <a:p>
             <a:pPr algn="l"/>
             <a:r>
-              <a:rPr sz="1050" b="0" lang="en-US">
+              <a:rPr sz="1400" b="1" lang="en-US">
                 <a:solidFill>
-                  <a:srgbClr val="65737D"/>
+                  <a:srgbClr val="263440"/>
                 </a:solidFill>
                 <a:latin typeface="Arial"/>
               </a:rPr>
-              <a:t>6 workers · 24 rounds + final inference</a:t>
+              <a:t>Receipts &amp; provenance</a:t>
             </a:r>
           </a:p>
         </p:txBody>
       </p:sp>
       <p:sp>
         <p:nvSpPr>
-          <p:cNvPr id="46" name="Rectangle 45"/>
-          <p:cNvSpPr/>
-          <p:nvPr/>
-        </p:nvSpPr>
-        <p:spPr>
-          <a:xfrm>
-            <a:off x="758952" y="3986784"/>
-            <a:ext cx="10789920" cy="10972"/>
-          </a:xfrm>
-          <a:prstGeom prst="rect">
-            <a:avLst/>
-          </a:prstGeom>
-          <a:solidFill>
-            <a:srgbClr val="DCE3E8"/>
-          </a:solidFill>
-          <a:ln>
-            <a:noFill/>
-          </a:ln>
-        </p:spPr>
-        <p:style>
-          <a:lnRef idx="1">
-            <a:schemeClr val="accent1"/>
-          </a:lnRef>
-          <a:fillRef idx="3">
-            <a:schemeClr val="accent1"/>
-          </a:fillRef>
-          <a:effectRef idx="2">
-            <a:schemeClr val="accent1"/>
-          </a:effectRef>
-          <a:fontRef idx="minor">
-            <a:schemeClr val="lt1"/>
-          </a:fontRef>
-        </p:style>
-        <p:txBody>
-          <a:bodyPr rtlCol="0" anchor="ctr"/>
-          <a:lstStyle/>
-          <a:p>
-            <a:pPr algn="ctr"/>
-          </a:p>
-        </p:txBody>
-      </p:sp>
-      <p:sp>
-        <p:nvSpPr>
-          <p:cNvPr id="47" name="Rectangle 46"/>
-          <p:cNvSpPr/>
-          <p:nvPr/>
-        </p:nvSpPr>
-        <p:spPr>
-          <a:xfrm>
-            <a:off x="621792" y="4014216"/>
-            <a:ext cx="41148" cy="507492"/>
-          </a:xfrm>
-          <a:prstGeom prst="rect">
-            <a:avLst/>
-          </a:prstGeom>
-          <a:solidFill>
-            <a:srgbClr val="65737D"/>
-          </a:solidFill>
-          <a:ln>
-            <a:solidFill>
-              <a:srgbClr val="65737D"/>
-            </a:solidFill>
-          </a:ln>
-        </p:spPr>
-        <p:style>
-          <a:lnRef idx="1">
-            <a:schemeClr val="accent1"/>
-          </a:lnRef>
-          <a:fillRef idx="3">
-            <a:schemeClr val="accent1"/>
-          </a:fillRef>
-          <a:effectRef idx="2">
-            <a:schemeClr val="accent1"/>
-          </a:effectRef>
-          <a:fontRef idx="minor">
-            <a:schemeClr val="lt1"/>
-          </a:fontRef>
-        </p:style>
-        <p:txBody>
-          <a:bodyPr rtlCol="0" anchor="ctr"/>
-          <a:lstStyle/>
-          <a:p>
-            <a:pPr algn="ctr"/>
-          </a:p>
-        </p:txBody>
-      </p:sp>
-      <p:sp>
-        <p:nvSpPr>
-          <p:cNvPr id="48" name="Test evaluation: Production checks*"/>
+          <p:cNvPr id="38" name="CI/external scope: AIR / Sello / SCITT · signatures · data provenance"/>
           <p:cNvSpPr txBox="1"/>
           <p:nvPr/>
         </p:nvSpPr>
         <p:spPr>
           <a:xfrm>
-            <a:off x="758952" y="4087368"/>
-            <a:ext cx="2075688" cy="384048"/>
+            <a:off x="832104" y="4137659"/>
+            <a:ext cx="4462272" cy="210312"/>
           </a:xfrm>
           <a:prstGeom prst="rect">
             <a:avLst/>
@@ -6111,27 +5915,27 @@
           <a:p>
             <a:pPr algn="l"/>
             <a:r>
-              <a:rPr sz="1400" b="1" lang="en-US">
+              <a:rPr sz="1120" b="0" lang="en-US">
                 <a:solidFill>
                   <a:srgbClr val="65737D"/>
                 </a:solidFill>
                 <a:latin typeface="Arial"/>
               </a:rPr>
-              <a:t>Production checks*</a:t>
+              <a:t>AIR / Sello / SCITT · signatures · data provenance</a:t>
             </a:r>
           </a:p>
         </p:txBody>
       </p:sp>
       <p:sp>
         <p:nvSpPr>
-          <p:cNvPr id="49" name="Test evaluation: 0"/>
+          <p:cNvPr id="39" name="CI/external scope: 64"/>
           <p:cNvSpPr txBox="1"/>
           <p:nvPr/>
         </p:nvSpPr>
         <p:spPr>
           <a:xfrm>
-            <a:off x="2880360" y="4014216"/>
-            <a:ext cx="1078992" cy="365760"/>
+            <a:off x="5230368" y="3941063"/>
+            <a:ext cx="502920" cy="310896"/>
           </a:xfrm>
           <a:prstGeom prst="rect">
             <a:avLst/>
@@ -6144,29 +5948,64 @@
           </a:bodyPr>
           <a:lstStyle/>
           <a:p>
-            <a:pPr algn="l"/>
-            <a:r>
-              <a:rPr sz="2300" b="1" lang="en-US">
+            <a:pPr algn="ctr"/>
+            <a:r>
+              <a:rPr sz="1800" b="1" lang="en-US">
                 <a:solidFill>
-                  <a:srgbClr val="65737D"/>
+                  <a:srgbClr val="1764A1"/>
                 </a:solidFill>
                 <a:latin typeface="Arial"/>
               </a:rPr>
-              <a:t>0</a:t>
+              <a:t>64</a:t>
             </a:r>
           </a:p>
         </p:txBody>
       </p:sp>
-      <p:sp>
-        <p:nvSpPr>
-          <p:cNvPr id="50" name="Test evaluation: identified"/>
+      <p:cxnSp>
+        <p:nvCxnSpPr>
+          <p:cNvPr id="40" name="Connector 39"/>
+          <p:cNvCxnSpPr/>
+          <p:nvPr/>
+        </p:nvCxnSpPr>
+        <p:spPr>
+          <a:xfrm>
+            <a:off x="832104" y="4338827"/>
+            <a:ext cx="4901184" cy="0"/>
+          </a:xfrm>
+          <a:prstGeom prst="line">
+            <a:avLst/>
+          </a:prstGeom>
+          <a:ln w="8890">
+            <a:solidFill>
+              <a:srgbClr val="DCE3E8"/>
+            </a:solidFill>
+          </a:ln>
+        </p:spPr>
+        <p:style>
+          <a:lnRef idx="2">
+            <a:schemeClr val="accent1"/>
+          </a:lnRef>
+          <a:fillRef idx="0">
+            <a:schemeClr val="accent1"/>
+          </a:fillRef>
+          <a:effectRef idx="1">
+            <a:schemeClr val="accent1"/>
+          </a:effectRef>
+          <a:fontRef idx="minor">
+            <a:schemeClr val="tx1"/>
+          </a:fontRef>
+        </p:style>
+      </p:cxnSp>
+      <p:sp>
+        <p:nvSpPr>
+          <p:cNvPr id="41" name="CI/external scope: Runtime control &amp; telemetry"/>
           <p:cNvSpPr txBox="1"/>
           <p:nvPr/>
         </p:nvSpPr>
         <p:spPr>
           <a:xfrm>
-            <a:off x="2880360" y="4375404"/>
-            <a:ext cx="1133856" cy="192024"/>
+            <a:off x="832104" y="4343400"/>
+            <a:ext cx="4215384" cy="246888"/>
           </a:xfrm>
           <a:prstGeom prst="rect">
             <a:avLst/>
@@ -6181,27 +6020,27 @@
           <a:p>
             <a:pPr algn="l"/>
             <a:r>
-              <a:rPr sz="1050" b="0" lang="en-US">
+              <a:rPr sz="1400" b="1" lang="en-US">
                 <a:solidFill>
-                  <a:srgbClr val="65737D"/>
+                  <a:srgbClr val="263440"/>
                 </a:solidFill>
                 <a:latin typeface="Arial"/>
               </a:rPr>
-              <a:t>identified</a:t>
+              <a:t>Runtime control &amp; telemetry</a:t>
             </a:r>
           </a:p>
         </p:txBody>
       </p:sp>
       <p:sp>
         <p:nvSpPr>
-          <p:cNvPr id="51" name="Test evaluation: Tests against the live deployment"/>
+          <p:cNvPr id="42" name="CI/external scope: Configuration · upload gates · worker telemetry"/>
           <p:cNvSpPr txBox="1"/>
           <p:nvPr/>
         </p:nvSpPr>
         <p:spPr>
           <a:xfrm>
-            <a:off x="4187952" y="4037076"/>
-            <a:ext cx="3813048" cy="246888"/>
+            <a:off x="832104" y="4576572"/>
+            <a:ext cx="4462272" cy="210312"/>
           </a:xfrm>
           <a:prstGeom prst="rect">
             <a:avLst/>
@@ -6216,27 +6055,132 @@
           <a:p>
             <a:pPr algn="l"/>
             <a:r>
+              <a:rPr sz="1120" b="0" lang="en-US">
+                <a:solidFill>
+                  <a:srgbClr val="65737D"/>
+                </a:solidFill>
+                <a:latin typeface="Arial"/>
+              </a:rPr>
+              <a:t>Configuration · upload gates · worker telemetry</a:t>
+            </a:r>
+          </a:p>
+        </p:txBody>
+      </p:sp>
+      <p:sp>
+        <p:nvSpPr>
+          <p:cNvPr id="43" name="CI/external scope: 107"/>
+          <p:cNvSpPr txBox="1"/>
+          <p:nvPr/>
+        </p:nvSpPr>
+        <p:spPr>
+          <a:xfrm>
+            <a:off x="5230368" y="4379976"/>
+            <a:ext cx="502920" cy="310896"/>
+          </a:xfrm>
+          <a:prstGeom prst="rect">
+            <a:avLst/>
+          </a:prstGeom>
+          <a:noFill/>
+        </p:spPr>
+        <p:txBody>
+          <a:bodyPr wrap="square" lIns="0" rIns="0" tIns="0" bIns="0" anchor="ctr">
+            <a:spAutoFit/>
+          </a:bodyPr>
+          <a:lstStyle/>
+          <a:p>
+            <a:pPr algn="ctr"/>
+            <a:r>
+              <a:rPr sz="1800" b="1" lang="en-US">
+                <a:solidFill>
+                  <a:srgbClr val="1764A1"/>
+                </a:solidFill>
+                <a:latin typeface="Arial"/>
+              </a:rPr>
+              <a:t>107</a:t>
+            </a:r>
+          </a:p>
+        </p:txBody>
+      </p:sp>
+      <p:cxnSp>
+        <p:nvCxnSpPr>
+          <p:cNvPr id="44" name="Connector 43"/>
+          <p:cNvCxnSpPr/>
+          <p:nvPr/>
+        </p:nvCxnSpPr>
+        <p:spPr>
+          <a:xfrm>
+            <a:off x="832104" y="4777740"/>
+            <a:ext cx="4901184" cy="0"/>
+          </a:xfrm>
+          <a:prstGeom prst="line">
+            <a:avLst/>
+          </a:prstGeom>
+          <a:ln w="8890">
+            <a:solidFill>
+              <a:srgbClr val="DCE3E8"/>
+            </a:solidFill>
+          </a:ln>
+        </p:spPr>
+        <p:style>
+          <a:lnRef idx="2">
+            <a:schemeClr val="accent1"/>
+          </a:lnRef>
+          <a:fillRef idx="0">
+            <a:schemeClr val="accent1"/>
+          </a:fillRef>
+          <a:effectRef idx="1">
+            <a:schemeClr val="accent1"/>
+          </a:effectRef>
+          <a:fontRef idx="minor">
+            <a:schemeClr val="tx1"/>
+          </a:fontRef>
+        </p:style>
+      </p:cxnSp>
+      <p:sp>
+        <p:nvSpPr>
+          <p:cNvPr id="45" name="CI/external scope: Deployment &amp; packaging"/>
+          <p:cNvSpPr txBox="1"/>
+          <p:nvPr/>
+        </p:nvSpPr>
+        <p:spPr>
+          <a:xfrm>
+            <a:off x="832104" y="4782312"/>
+            <a:ext cx="4215384" cy="246888"/>
+          </a:xfrm>
+          <a:prstGeom prst="rect">
+            <a:avLst/>
+          </a:prstGeom>
+          <a:noFill/>
+        </p:spPr>
+        <p:txBody>
+          <a:bodyPr wrap="square" lIns="0" rIns="0" tIns="0" bIns="0" anchor="ctr">
+            <a:spAutoFit/>
+          </a:bodyPr>
+          <a:lstStyle/>
+          <a:p>
+            <a:pPr algn="l"/>
+            <a:r>
               <a:rPr sz="1400" b="1" lang="en-US">
                 <a:solidFill>
                   <a:srgbClr val="263440"/>
                 </a:solidFill>
                 <a:latin typeface="Arial"/>
               </a:rPr>
-              <a:t>Tests against the live deployment</a:t>
+              <a:t>Deployment &amp; packaging</a:t>
             </a:r>
           </a:p>
         </p:txBody>
       </p:sp>
       <p:sp>
         <p:nvSpPr>
-          <p:cNvPr id="52" name="Test evaluation: Operational behaviour under real load"/>
+          <p:cNvPr id="46" name="CI/external scope: Image policy · revision order · Docker / Terraform"/>
           <p:cNvSpPr txBox="1"/>
           <p:nvPr/>
         </p:nvSpPr>
         <p:spPr>
           <a:xfrm>
-            <a:off x="4187952" y="4315968"/>
-            <a:ext cx="3813048" cy="219456"/>
+            <a:off x="832104" y="5015484"/>
+            <a:ext cx="4462272" cy="210312"/>
           </a:xfrm>
           <a:prstGeom prst="rect">
             <a:avLst/>
@@ -6251,27 +6195,27 @@
           <a:p>
             <a:pPr algn="l"/>
             <a:r>
-              <a:rPr sz="1150" b="0" lang="en-US">
+              <a:rPr sz="1120" b="0" lang="en-US">
                 <a:solidFill>
                   <a:srgbClr val="65737D"/>
                 </a:solidFill>
                 <a:latin typeface="Arial"/>
               </a:rPr>
-              <a:t>Operational behaviour under real load</a:t>
+              <a:t>Image policy · revision order · Docker / Terraform</a:t>
             </a:r>
           </a:p>
         </p:txBody>
       </p:sp>
       <p:sp>
         <p:nvSpPr>
-          <p:cNvPr id="53" name="Test evaluation: No suite identified"/>
+          <p:cNvPr id="47" name="CI/external scope: 223"/>
           <p:cNvSpPr txBox="1"/>
           <p:nvPr/>
         </p:nvSpPr>
         <p:spPr>
           <a:xfrm>
-            <a:off x="8211312" y="4037076"/>
-            <a:ext cx="3218688" cy="246888"/>
+            <a:off x="5230368" y="4818888"/>
+            <a:ext cx="502920" cy="310896"/>
           </a:xfrm>
           <a:prstGeom prst="rect">
             <a:avLst/>
@@ -6284,29 +6228,29 @@
           </a:bodyPr>
           <a:lstStyle/>
           <a:p>
-            <a:pPr algn="l"/>
-            <a:r>
-              <a:rPr sz="1400" b="1" lang="en-US">
+            <a:pPr algn="ctr"/>
+            <a:r>
+              <a:rPr sz="1800" b="1" lang="en-US">
                 <a:solidFill>
-                  <a:srgbClr val="65737D"/>
+                  <a:srgbClr val="1764A1"/>
                 </a:solidFill>
                 <a:latin typeface="Arial"/>
               </a:rPr>
-              <a:t>No suite identified</a:t>
+              <a:t>223</a:t>
             </a:r>
           </a:p>
         </p:txBody>
       </p:sp>
       <p:sp>
         <p:nvSpPr>
-          <p:cNvPr id="54" name="Test evaluation: Within the audited CI scope"/>
+          <p:cNvPr id="48" name="CI/external scope: Settings · configuration"/>
           <p:cNvSpPr txBox="1"/>
           <p:nvPr/>
         </p:nvSpPr>
         <p:spPr>
           <a:xfrm>
-            <a:off x="8211312" y="4315968"/>
-            <a:ext cx="3218688" cy="219456"/>
+            <a:off x="6318504" y="2148840"/>
+            <a:ext cx="5029200" cy="265176"/>
           </a:xfrm>
           <a:prstGeom prst="rect">
             <a:avLst/>
@@ -6321,115 +6265,27 @@
           <a:p>
             <a:pPr algn="l"/>
             <a:r>
-              <a:rPr sz="1050" b="0" lang="en-US">
+              <a:rPr sz="1400" b="1" lang="en-US">
                 <a:solidFill>
-                  <a:srgbClr val="65737D"/>
+                  <a:srgbClr val="263440"/>
                 </a:solidFill>
                 <a:latin typeface="Arial"/>
               </a:rPr>
-              <a:t>Within the audited CI scope</a:t>
+              <a:t>Settings · configuration</a:t>
             </a:r>
           </a:p>
         </p:txBody>
       </p:sp>
       <p:sp>
         <p:nvSpPr>
-          <p:cNvPr id="55" name="Rectangle 54"/>
-          <p:cNvSpPr/>
-          <p:nvPr/>
-        </p:nvSpPr>
-        <p:spPr>
-          <a:xfrm>
-            <a:off x="758952" y="4572000"/>
-            <a:ext cx="10789920" cy="10972"/>
-          </a:xfrm>
-          <a:prstGeom prst="rect">
-            <a:avLst/>
-          </a:prstGeom>
-          <a:solidFill>
-            <a:srgbClr val="DCE3E8"/>
-          </a:solidFill>
-          <a:ln>
-            <a:noFill/>
-          </a:ln>
-        </p:spPr>
-        <p:style>
-          <a:lnRef idx="1">
-            <a:schemeClr val="accent1"/>
-          </a:lnRef>
-          <a:fillRef idx="3">
-            <a:schemeClr val="accent1"/>
-          </a:fillRef>
-          <a:effectRef idx="2">
-            <a:schemeClr val="accent1"/>
-          </a:effectRef>
-          <a:fontRef idx="minor">
-            <a:schemeClr val="lt1"/>
-          </a:fontRef>
-        </p:style>
-        <p:txBody>
-          <a:bodyPr rtlCol="0" anchor="ctr"/>
-          <a:lstStyle/>
-          <a:p>
-            <a:pPr algn="ctr"/>
-          </a:p>
-        </p:txBody>
-      </p:sp>
-      <p:sp>
-        <p:nvSpPr>
-          <p:cNvPr id="56" name="Rectangle 55"/>
-          <p:cNvSpPr/>
-          <p:nvPr/>
-        </p:nvSpPr>
-        <p:spPr>
-          <a:xfrm>
-            <a:off x="621792" y="4727448"/>
-            <a:ext cx="10954512" cy="484632"/>
-          </a:xfrm>
-          <a:prstGeom prst="rect">
-            <a:avLst/>
-          </a:prstGeom>
-          <a:solidFill>
-            <a:srgbClr val="F2F5F7"/>
-          </a:solidFill>
-          <a:ln>
-            <a:solidFill>
-              <a:srgbClr val="263440"/>
-            </a:solidFill>
-          </a:ln>
-        </p:spPr>
-        <p:style>
-          <a:lnRef idx="1">
-            <a:schemeClr val="accent1"/>
-          </a:lnRef>
-          <a:fillRef idx="3">
-            <a:schemeClr val="accent1"/>
-          </a:fillRef>
-          <a:effectRef idx="2">
-            <a:schemeClr val="accent1"/>
-          </a:effectRef>
-          <a:fontRef idx="minor">
-            <a:schemeClr val="lt1"/>
-          </a:fontRef>
-        </p:style>
-        <p:txBody>
-          <a:bodyPr rtlCol="0" anchor="ctr"/>
-          <a:lstStyle/>
-          <a:p>
-            <a:pPr algn="ctr"/>
-          </a:p>
-        </p:txBody>
-      </p:sp>
-      <p:sp>
-        <p:nvSpPr>
-          <p:cNvPr id="57" name="Test evaluation: CI: push / pull request / manual · Ubuntu runners"/>
+          <p:cNvPr id="49" name="CI/external scope: Save/read parameters; reject invalid deadlines"/>
           <p:cNvSpPr txBox="1"/>
           <p:nvPr/>
         </p:nvSpPr>
         <p:spPr>
           <a:xfrm>
-            <a:off x="768096" y="4759452"/>
-            <a:ext cx="5852160" cy="393192"/>
+            <a:off x="6318504" y="2418588"/>
+            <a:ext cx="5029200" cy="210312"/>
           </a:xfrm>
           <a:prstGeom prst="rect">
             <a:avLst/>
@@ -6444,27 +6300,62 @@
           <a:p>
             <a:pPr algn="l"/>
             <a:r>
-              <a:rPr sz="1300" b="1" lang="en-US">
+              <a:rPr sz="1140" b="0" lang="en-US">
                 <a:solidFill>
-                  <a:srgbClr val="263440"/>
+                  <a:srgbClr val="65737D"/>
                 </a:solidFill>
                 <a:latin typeface="Arial"/>
               </a:rPr>
-              <a:t>CI: push / pull request / manual · Ubuntu runners</a:t>
+              <a:t>Save/read parameters; reject invalid deadlines</a:t>
             </a:r>
           </a:p>
         </p:txBody>
       </p:sp>
-      <p:sp>
-        <p:nvSpPr>
-          <p:cNvPr id="58" name="Test evaluation: + 2 service smoke checks: Anvil + IPFS"/>
+      <p:cxnSp>
+        <p:nvCxnSpPr>
+          <p:cNvPr id="50" name="Connector 49"/>
+          <p:cNvCxnSpPr/>
+          <p:nvPr/>
+        </p:nvCxnSpPr>
+        <p:spPr>
+          <a:xfrm>
+            <a:off x="6318504" y="2638044"/>
+            <a:ext cx="5020056" cy="0"/>
+          </a:xfrm>
+          <a:prstGeom prst="line">
+            <a:avLst/>
+          </a:prstGeom>
+          <a:ln w="8890">
+            <a:solidFill>
+              <a:srgbClr val="DCE3E8"/>
+            </a:solidFill>
+          </a:ln>
+        </p:spPr>
+        <p:style>
+          <a:lnRef idx="2">
+            <a:schemeClr val="accent1"/>
+          </a:lnRef>
+          <a:fillRef idx="0">
+            <a:schemeClr val="accent1"/>
+          </a:fillRef>
+          <a:effectRef idx="1">
+            <a:schemeClr val="accent1"/>
+          </a:effectRef>
+          <a:fontRef idx="minor">
+            <a:schemeClr val="tx1"/>
+          </a:fontRef>
+        </p:style>
+      </p:cxnSp>
+      <p:sp>
+        <p:nvSpPr>
+          <p:cNvPr id="51" name="CI/external scope: Lifecycle · normal / inference"/>
           <p:cNvSpPr txBox="1"/>
           <p:nvPr/>
         </p:nvSpPr>
         <p:spPr>
           <a:xfrm>
-            <a:off x="6784848" y="4759452"/>
-            <a:ext cx="4608576" cy="393192"/>
+            <a:off x="6318504" y="2656332"/>
+            <a:ext cx="5029200" cy="265176"/>
           </a:xfrm>
           <a:prstGeom prst="rect">
             <a:avLst/>
@@ -6479,27 +6370,27 @@
           <a:p>
             <a:pPr algn="l"/>
             <a:r>
-              <a:rPr sz="1250" b="0" lang="en-US">
+              <a:rPr sz="1400" b="1" lang="en-US">
                 <a:solidFill>
                   <a:srgbClr val="263440"/>
                 </a:solidFill>
                 <a:latin typeface="Arial"/>
               </a:rPr>
-              <a:t>+ 2 service smoke checks: Anvil + IPFS</a:t>
+              <a:t>Lifecycle · normal / inference</a:t>
             </a:r>
           </a:p>
         </p:txBody>
       </p:sp>
       <p:sp>
         <p:nvSpPr>
-          <p:cNvPr id="59" name="Test evaluation: Static definitions, including conditional skips; parameter variants counted once. No pass count."/>
+          <p:cNvPr id="52" name="CI/external scope: Complete training; use and verify the finalized model"/>
           <p:cNvSpPr txBox="1"/>
           <p:nvPr/>
         </p:nvSpPr>
         <p:spPr>
           <a:xfrm>
-            <a:off x="621792" y="5312664"/>
-            <a:ext cx="10954512" cy="210312"/>
+            <a:off x="6318504" y="2926080"/>
+            <a:ext cx="5029200" cy="210312"/>
           </a:xfrm>
           <a:prstGeom prst="rect">
             <a:avLst/>
@@ -6514,27 +6405,62 @@
           <a:p>
             <a:pPr algn="l"/>
             <a:r>
-              <a:rPr sz="1050" b="0" lang="en-US">
+              <a:rPr sz="1140" b="0" lang="en-US">
                 <a:solidFill>
                   <a:srgbClr val="65737D"/>
                 </a:solidFill>
                 <a:latin typeface="Arial"/>
               </a:rPr>
-              <a:t>Static definitions, including conditional skips; parameter variants counted once. No pass count.</a:t>
+              <a:t>Complete training; use and verify the finalized model</a:t>
             </a:r>
           </a:p>
         </p:txBody>
       </p:sp>
-      <p:sp>
-        <p:nvSpPr>
-          <p:cNvPr id="60" name="Test evaluation: * Production denotes an execution context. Current-code inventory and recorded cloud run are separate evidence."/>
+      <p:cxnSp>
+        <p:nvCxnSpPr>
+          <p:cNvPr id="53" name="Connector 52"/>
+          <p:cNvCxnSpPr/>
+          <p:nvPr/>
+        </p:nvCxnSpPr>
+        <p:spPr>
+          <a:xfrm>
+            <a:off x="6318504" y="3145536"/>
+            <a:ext cx="5020056" cy="0"/>
+          </a:xfrm>
+          <a:prstGeom prst="line">
+            <a:avLst/>
+          </a:prstGeom>
+          <a:ln w="8890">
+            <a:solidFill>
+              <a:srgbClr val="DCE3E8"/>
+            </a:solidFill>
+          </a:ln>
+        </p:spPr>
+        <p:style>
+          <a:lnRef idx="2">
+            <a:schemeClr val="accent1"/>
+          </a:lnRef>
+          <a:fillRef idx="0">
+            <a:schemeClr val="accent1"/>
+          </a:fillRef>
+          <a:effectRef idx="1">
+            <a:schemeClr val="accent1"/>
+          </a:effectRef>
+          <a:fontRef idx="minor">
+            <a:schemeClr val="tx1"/>
+          </a:fontRef>
+        </p:style>
+      </p:cxnSp>
+      <p:sp>
+        <p:nvSpPr>
+          <p:cNvPr id="54" name="CI/external scope: Collection · early / partial / zero"/>
           <p:cNvSpPr txBox="1"/>
           <p:nvPr/>
         </p:nvSpPr>
         <p:spPr>
           <a:xfrm>
-            <a:off x="621792" y="5554980"/>
-            <a:ext cx="10954512" cy="210312"/>
+            <a:off x="6318504" y="3163824"/>
+            <a:ext cx="5029200" cy="265176"/>
           </a:xfrm>
           <a:prstGeom prst="rect">
             <a:avLst/>
@@ -6549,13 +6475,398 @@
           <a:p>
             <a:pPr algn="l"/>
             <a:r>
-              <a:rPr sz="950" b="0" lang="en-US">
+              <a:rPr sz="1400" b="1" lang="en-US">
+                <a:solidFill>
+                  <a:srgbClr val="263440"/>
+                </a:solidFill>
+                <a:latin typeface="Arial"/>
+              </a:rPr>
+              <a:t>Collection · early / partial / zero</a:t>
+            </a:r>
+          </a:p>
+        </p:txBody>
+      </p:sp>
+      <p:sp>
+        <p:nvSpPr>
+          <p:cNvPr id="55" name="CI/external scope: Close early, publish partial inputs, or recover from zero"/>
+          <p:cNvSpPr txBox="1"/>
+          <p:nvPr/>
+        </p:nvSpPr>
+        <p:spPr>
+          <a:xfrm>
+            <a:off x="6318504" y="3433572"/>
+            <a:ext cx="5029200" cy="210312"/>
+          </a:xfrm>
+          <a:prstGeom prst="rect">
+            <a:avLst/>
+          </a:prstGeom>
+          <a:noFill/>
+        </p:spPr>
+        <p:txBody>
+          <a:bodyPr wrap="square" lIns="0" rIns="0" tIns="0" bIns="0" anchor="ctr">
+            <a:spAutoFit/>
+          </a:bodyPr>
+          <a:lstStyle/>
+          <a:p>
+            <a:pPr algn="l"/>
+            <a:r>
+              <a:rPr sz="1140" b="0" lang="en-US">
                 <a:solidFill>
                   <a:srgbClr val="65737D"/>
                 </a:solidFill>
                 <a:latin typeface="Arial"/>
               </a:rPr>
-              <a:t>* Production denotes an execution context. Current-code inventory and recorded cloud run are separate evidence.</a:t>
+              <a:t>Close early, publish partial inputs, or recover from zero</a:t>
+            </a:r>
+          </a:p>
+        </p:txBody>
+      </p:sp>
+      <p:cxnSp>
+        <p:nvCxnSpPr>
+          <p:cNvPr id="56" name="Connector 55"/>
+          <p:cNvCxnSpPr/>
+          <p:nvPr/>
+        </p:nvCxnSpPr>
+        <p:spPr>
+          <a:xfrm>
+            <a:off x="6318504" y="3653028"/>
+            <a:ext cx="5020056" cy="0"/>
+          </a:xfrm>
+          <a:prstGeom prst="line">
+            <a:avLst/>
+          </a:prstGeom>
+          <a:ln w="8890">
+            <a:solidFill>
+              <a:srgbClr val="DCE3E8"/>
+            </a:solidFill>
+          </a:ln>
+        </p:spPr>
+        <p:style>
+          <a:lnRef idx="2">
+            <a:schemeClr val="accent1"/>
+          </a:lnRef>
+          <a:fillRef idx="0">
+            <a:schemeClr val="accent1"/>
+          </a:fillRef>
+          <a:effectRef idx="1">
+            <a:schemeClr val="accent1"/>
+          </a:effectRef>
+          <a:fontRef idx="minor">
+            <a:schemeClr val="tx1"/>
+          </a:fontRef>
+        </p:style>
+      </p:cxnSp>
+      <p:sp>
+        <p:nvSpPr>
+          <p:cNvPr id="57" name="CI/external scope: Recovery · aggregator outage"/>
+          <p:cNvSpPr txBox="1"/>
+          <p:nvPr/>
+        </p:nvSpPr>
+        <p:spPr>
+          <a:xfrm>
+            <a:off x="6318504" y="3671316"/>
+            <a:ext cx="5029200" cy="265176"/>
+          </a:xfrm>
+          <a:prstGeom prst="rect">
+            <a:avLst/>
+          </a:prstGeom>
+          <a:noFill/>
+        </p:spPr>
+        <p:txBody>
+          <a:bodyPr wrap="square" lIns="0" rIns="0" tIns="0" bIns="0" anchor="ctr">
+            <a:spAutoFit/>
+          </a:bodyPr>
+          <a:lstStyle/>
+          <a:p>
+            <a:pPr algn="l"/>
+            <a:r>
+              <a:rPr sz="1400" b="1" lang="en-US">
+                <a:solidFill>
+                  <a:srgbClr val="263440"/>
+                </a:solidFill>
+                <a:latin typeface="Arial"/>
+              </a:rPr>
+              <a:t>Recovery · aggregator outage</a:t>
+            </a:r>
+          </a:p>
+        </p:txBody>
+      </p:sp>
+      <p:sp>
+        <p:nvSpPr>
+          <p:cNvPr id="58" name="CI/external scope: Stop CVM; 1/3 → 2/3 → 3/3 votes; elect a replacement"/>
+          <p:cNvSpPr txBox="1"/>
+          <p:nvPr/>
+        </p:nvSpPr>
+        <p:spPr>
+          <a:xfrm>
+            <a:off x="6318504" y="3941064"/>
+            <a:ext cx="5029200" cy="210312"/>
+          </a:xfrm>
+          <a:prstGeom prst="rect">
+            <a:avLst/>
+          </a:prstGeom>
+          <a:noFill/>
+        </p:spPr>
+        <p:txBody>
+          <a:bodyPr wrap="square" lIns="0" rIns="0" tIns="0" bIns="0" anchor="ctr">
+            <a:spAutoFit/>
+          </a:bodyPr>
+          <a:lstStyle/>
+          <a:p>
+            <a:pPr algn="l"/>
+            <a:r>
+              <a:rPr sz="1140" b="0" lang="en-US">
+                <a:solidFill>
+                  <a:srgbClr val="65737D"/>
+                </a:solidFill>
+                <a:latin typeface="Arial"/>
+              </a:rPr>
+              <a:t>Stop CVM; 1/3 → 2/3 → 3/3 votes; elect a replacement</a:t>
+            </a:r>
+          </a:p>
+        </p:txBody>
+      </p:sp>
+      <p:cxnSp>
+        <p:nvCxnSpPr>
+          <p:cNvPr id="59" name="Connector 58"/>
+          <p:cNvCxnSpPr/>
+          <p:nvPr/>
+        </p:nvCxnSpPr>
+        <p:spPr>
+          <a:xfrm>
+            <a:off x="6318504" y="4160520"/>
+            <a:ext cx="5020056" cy="0"/>
+          </a:xfrm>
+          <a:prstGeom prst="line">
+            <a:avLst/>
+          </a:prstGeom>
+          <a:ln w="8890">
+            <a:solidFill>
+              <a:srgbClr val="DCE3E8"/>
+            </a:solidFill>
+          </a:ln>
+        </p:spPr>
+        <p:style>
+          <a:lnRef idx="2">
+            <a:schemeClr val="accent1"/>
+          </a:lnRef>
+          <a:fillRef idx="0">
+            <a:schemeClr val="accent1"/>
+          </a:fillRef>
+          <a:effectRef idx="1">
+            <a:schemeClr val="accent1"/>
+          </a:effectRef>
+          <a:fontRef idx="minor">
+            <a:schemeClr val="tx1"/>
+          </a:fontRef>
+        </p:style>
+      </p:cxnSp>
+      <p:sp>
+        <p:nvSpPr>
+          <p:cNvPr id="60" name="CI/external scope: Security · access and contract guards"/>
+          <p:cNvSpPr txBox="1"/>
+          <p:nvPr/>
+        </p:nvSpPr>
+        <p:spPr>
+          <a:xfrm>
+            <a:off x="6318504" y="4178808"/>
+            <a:ext cx="5029200" cy="265176"/>
+          </a:xfrm>
+          <a:prstGeom prst="rect">
+            <a:avLst/>
+          </a:prstGeom>
+          <a:noFill/>
+        </p:spPr>
+        <p:txBody>
+          <a:bodyPr wrap="square" lIns="0" rIns="0" tIns="0" bIns="0" anchor="ctr">
+            <a:spAutoFit/>
+          </a:bodyPr>
+          <a:lstStyle/>
+          <a:p>
+            <a:pPr algn="l"/>
+            <a:r>
+              <a:rPr sz="1400" b="1" lang="en-US">
+                <a:solidFill>
+                  <a:srgbClr val="263440"/>
+                </a:solidFill>
+                <a:latin typeface="Arial"/>
+              </a:rPr>
+              <a:t>Security · access and contract guards</a:t>
+            </a:r>
+          </a:p>
+        </p:txBody>
+      </p:sp>
+      <p:sp>
+        <p:nvSpPr>
+          <p:cNvPr id="61" name="CI/external scope: 16 checks: access, contracts + positive inference"/>
+          <p:cNvSpPr txBox="1"/>
+          <p:nvPr/>
+        </p:nvSpPr>
+        <p:spPr>
+          <a:xfrm>
+            <a:off x="6318504" y="4448556"/>
+            <a:ext cx="5029200" cy="210312"/>
+          </a:xfrm>
+          <a:prstGeom prst="rect">
+            <a:avLst/>
+          </a:prstGeom>
+          <a:noFill/>
+        </p:spPr>
+        <p:txBody>
+          <a:bodyPr wrap="square" lIns="0" rIns="0" tIns="0" bIns="0" anchor="ctr">
+            <a:spAutoFit/>
+          </a:bodyPr>
+          <a:lstStyle/>
+          <a:p>
+            <a:pPr algn="l"/>
+            <a:r>
+              <a:rPr sz="1140" b="0" lang="en-US">
+                <a:solidFill>
+                  <a:srgbClr val="65737D"/>
+                </a:solidFill>
+                <a:latin typeface="Arial"/>
+              </a:rPr>
+              <a:t>16 checks: access, contracts + positive inference</a:t>
+            </a:r>
+          </a:p>
+        </p:txBody>
+      </p:sp>
+      <p:cxnSp>
+        <p:nvCxnSpPr>
+          <p:cNvPr id="62" name="Connector 61"/>
+          <p:cNvCxnSpPr/>
+          <p:nvPr/>
+        </p:nvCxnSpPr>
+        <p:spPr>
+          <a:xfrm>
+            <a:off x="6318504" y="4668012"/>
+            <a:ext cx="5020056" cy="0"/>
+          </a:xfrm>
+          <a:prstGeom prst="line">
+            <a:avLst/>
+          </a:prstGeom>
+          <a:ln w="8890">
+            <a:solidFill>
+              <a:srgbClr val="DCE3E8"/>
+            </a:solidFill>
+          </a:ln>
+        </p:spPr>
+        <p:style>
+          <a:lnRef idx="2">
+            <a:schemeClr val="accent1"/>
+          </a:lnRef>
+          <a:fillRef idx="0">
+            <a:schemeClr val="accent1"/>
+          </a:fillRef>
+          <a:effectRef idx="1">
+            <a:schemeClr val="accent1"/>
+          </a:effectRef>
+          <a:fontRef idx="minor">
+            <a:schemeClr val="tx1"/>
+          </a:fontRef>
+        </p:style>
+      </p:cxnSp>
+      <p:sp>
+        <p:nvSpPr>
+          <p:cNvPr id="63" name="CI/external scope: Evidence · published receipt audit"/>
+          <p:cNvSpPr txBox="1"/>
+          <p:nvPr/>
+        </p:nvSpPr>
+        <p:spPr>
+          <a:xfrm>
+            <a:off x="6318504" y="4686300"/>
+            <a:ext cx="5029200" cy="265176"/>
+          </a:xfrm>
+          <a:prstGeom prst="rect">
+            <a:avLst/>
+          </a:prstGeom>
+          <a:noFill/>
+        </p:spPr>
+        <p:txBody>
+          <a:bodyPr wrap="square" lIns="0" rIns="0" tIns="0" bIns="0" anchor="ctr">
+            <a:spAutoFit/>
+          </a:bodyPr>
+          <a:lstStyle/>
+          <a:p>
+            <a:pPr algn="l"/>
+            <a:r>
+              <a:rPr sz="1400" b="1" lang="en-US">
+                <a:solidFill>
+                  <a:srgbClr val="263440"/>
+                </a:solidFill>
+                <a:latin typeface="Arial"/>
+              </a:rPr>
+              <a:t>Evidence · published receipt audit</a:t>
+            </a:r>
+          </a:p>
+        </p:txBody>
+      </p:sp>
+      <p:sp>
+        <p:nvSpPr>
+          <p:cNvPr id="64" name="CI/external scope: 17 checks: SCITT, AIR/TDX, sessions and Sello"/>
+          <p:cNvSpPr txBox="1"/>
+          <p:nvPr/>
+        </p:nvSpPr>
+        <p:spPr>
+          <a:xfrm>
+            <a:off x="6318504" y="4956048"/>
+            <a:ext cx="5029200" cy="210312"/>
+          </a:xfrm>
+          <a:prstGeom prst="rect">
+            <a:avLst/>
+          </a:prstGeom>
+          <a:noFill/>
+        </p:spPr>
+        <p:txBody>
+          <a:bodyPr wrap="square" lIns="0" rIns="0" tIns="0" bIns="0" anchor="ctr">
+            <a:spAutoFit/>
+          </a:bodyPr>
+          <a:lstStyle/>
+          <a:p>
+            <a:pPr algn="l"/>
+            <a:r>
+              <a:rPr sz="1140" b="0" lang="en-US">
+                <a:solidFill>
+                  <a:srgbClr val="65737D"/>
+                </a:solidFill>
+                <a:latin typeface="Arial"/>
+              </a:rPr>
+              <a:t>17 checks: SCITT, AIR/TDX, sessions and Sello</a:t>
+            </a:r>
+          </a:p>
+        </p:txBody>
+      </p:sp>
+      <p:sp>
+        <p:nvSpPr>
+          <p:cNvPr id="65" name="CI/external scope: Phala training profile: 6 workers · 5 successful rounds · client limit 5 · 45 s deadline. Counts ≠ passed runs."/>
+          <p:cNvSpPr txBox="1"/>
+          <p:nvPr/>
+        </p:nvSpPr>
+        <p:spPr>
+          <a:xfrm>
+            <a:off x="658368" y="5468112"/>
+            <a:ext cx="10890504" cy="265176"/>
+          </a:xfrm>
+          <a:prstGeom prst="rect">
+            <a:avLst/>
+          </a:prstGeom>
+          <a:noFill/>
+        </p:spPr>
+        <p:txBody>
+          <a:bodyPr wrap="square" lIns="0" rIns="0" tIns="0" bIns="0" anchor="ctr">
+            <a:spAutoFit/>
+          </a:bodyPr>
+          <a:lstStyle/>
+          <a:p>
+            <a:pPr algn="l"/>
+            <a:r>
+              <a:rPr sz="1130" b="0" lang="en-US">
+                <a:solidFill>
+                  <a:srgbClr val="65737D"/>
+                </a:solidFill>
+                <a:latin typeface="Arial"/>
+              </a:rPr>
+              <a:t>Phala training profile: 6 workers · 5 successful rounds · client limit 5 · 45 s deadline. Counts ≠ passed runs.</a:t>
             </a:r>
           </a:p>
         </p:txBody>
